--- a/public/slides/aa203/lecture_13.pptx
+++ b/public/slides/aa203/lecture_13.pptx
@@ -190,6 +190,90 @@
 </p:presentation>
 </file>
 
+<file path=ppt/changesInfos/changesInfo1.xml><?xml version="1.0" encoding="utf-8"?>
+<pc:chgInfo xmlns:a="http://schemas.openxmlformats.org/drawingml/2006/main" xmlns:r="http://schemas.openxmlformats.org/officeDocument/2006/relationships" xmlns:ac="http://schemas.microsoft.com/office/drawing/2013/main/command" xmlns:pc="http://schemas.microsoft.com/office/powerpoint/2013/main/command">
+  <pc:docChgLst>
+    <pc:chgData name="Daniele Gammelli" userId="292b8a31-f1ba-4b4c-b196-a231dc095d13" providerId="ADAL" clId="{6E670754-AB6A-5789-AA0A-6F6FD9CE3EEA}"/>
+    <pc:docChg chg="modSld">
+      <pc:chgData name="Daniele Gammelli" userId="292b8a31-f1ba-4b4c-b196-a231dc095d13" providerId="ADAL" clId="{6E670754-AB6A-5789-AA0A-6F6FD9CE3EEA}" dt="2026-08-13T21:19:40.219" v="9" actId="20577"/>
+      <pc:docMkLst>
+        <pc:docMk/>
+      </pc:docMkLst>
+      <pc:sldChg chg="modNotesTx">
+        <pc:chgData name="Daniele Gammelli" userId="292b8a31-f1ba-4b4c-b196-a231dc095d13" providerId="ADAL" clId="{6E670754-AB6A-5789-AA0A-6F6FD9CE3EEA}" dt="2026-08-13T21:19:15.292" v="0" actId="20577"/>
+        <pc:sldMkLst>
+          <pc:docMk/>
+          <pc:sldMk cId="3490948641" sldId="402"/>
+        </pc:sldMkLst>
+      </pc:sldChg>
+      <pc:sldChg chg="modNotesTx">
+        <pc:chgData name="Daniele Gammelli" userId="292b8a31-f1ba-4b4c-b196-a231dc095d13" providerId="ADAL" clId="{6E670754-AB6A-5789-AA0A-6F6FD9CE3EEA}" dt="2026-08-13T21:19:20.983" v="2" actId="20577"/>
+        <pc:sldMkLst>
+          <pc:docMk/>
+          <pc:sldMk cId="2025983812" sldId="404"/>
+        </pc:sldMkLst>
+      </pc:sldChg>
+      <pc:sldChg chg="modNotesTx">
+        <pc:chgData name="Daniele Gammelli" userId="292b8a31-f1ba-4b4c-b196-a231dc095d13" providerId="ADAL" clId="{6E670754-AB6A-5789-AA0A-6F6FD9CE3EEA}" dt="2026-08-13T21:19:33.585" v="7" actId="20577"/>
+        <pc:sldMkLst>
+          <pc:docMk/>
+          <pc:sldMk cId="900621386" sldId="407"/>
+        </pc:sldMkLst>
+      </pc:sldChg>
+      <pc:sldChg chg="modNotesTx">
+        <pc:chgData name="Daniele Gammelli" userId="292b8a31-f1ba-4b4c-b196-a231dc095d13" providerId="ADAL" clId="{6E670754-AB6A-5789-AA0A-6F6FD9CE3EEA}" dt="2026-08-13T21:19:40.219" v="9" actId="20577"/>
+        <pc:sldMkLst>
+          <pc:docMk/>
+          <pc:sldMk cId="782093395" sldId="409"/>
+        </pc:sldMkLst>
+      </pc:sldChg>
+      <pc:sldChg chg="modNotesTx">
+        <pc:chgData name="Daniele Gammelli" userId="292b8a31-f1ba-4b4c-b196-a231dc095d13" providerId="ADAL" clId="{6E670754-AB6A-5789-AA0A-6F6FD9CE3EEA}" dt="2026-08-13T21:19:25.334" v="3" actId="20577"/>
+        <pc:sldMkLst>
+          <pc:docMk/>
+          <pc:sldMk cId="2741832432" sldId="438"/>
+        </pc:sldMkLst>
+      </pc:sldChg>
+      <pc:sldChg chg="modNotesTx">
+        <pc:chgData name="Daniele Gammelli" userId="292b8a31-f1ba-4b4c-b196-a231dc095d13" providerId="ADAL" clId="{6E670754-AB6A-5789-AA0A-6F6FD9CE3EEA}" dt="2026-08-13T21:19:29.778" v="5" actId="20577"/>
+        <pc:sldMkLst>
+          <pc:docMk/>
+          <pc:sldMk cId="2270021002" sldId="441"/>
+        </pc:sldMkLst>
+      </pc:sldChg>
+      <pc:sldChg chg="modNotesTx">
+        <pc:chgData name="Daniele Gammelli" userId="292b8a31-f1ba-4b4c-b196-a231dc095d13" providerId="ADAL" clId="{6E670754-AB6A-5789-AA0A-6F6FD9CE3EEA}" dt="2026-08-13T21:19:38.753" v="8" actId="20577"/>
+        <pc:sldMkLst>
+          <pc:docMk/>
+          <pc:sldMk cId="2768658658" sldId="442"/>
+        </pc:sldMkLst>
+      </pc:sldChg>
+      <pc:sldChg chg="modNotesTx">
+        <pc:chgData name="Daniele Gammelli" userId="292b8a31-f1ba-4b4c-b196-a231dc095d13" providerId="ADAL" clId="{6E670754-AB6A-5789-AA0A-6F6FD9CE3EEA}" dt="2026-08-13T21:19:17.314" v="1" actId="20577"/>
+        <pc:sldMkLst>
+          <pc:docMk/>
+          <pc:sldMk cId="2007465256" sldId="443"/>
+        </pc:sldMkLst>
+      </pc:sldChg>
+      <pc:sldChg chg="modNotesTx">
+        <pc:chgData name="Daniele Gammelli" userId="292b8a31-f1ba-4b4c-b196-a231dc095d13" providerId="ADAL" clId="{6E670754-AB6A-5789-AA0A-6F6FD9CE3EEA}" dt="2026-08-13T21:19:26.925" v="4" actId="20577"/>
+        <pc:sldMkLst>
+          <pc:docMk/>
+          <pc:sldMk cId="3840376161" sldId="546"/>
+        </pc:sldMkLst>
+      </pc:sldChg>
+      <pc:sldChg chg="modNotesTx">
+        <pc:chgData name="Daniele Gammelli" userId="292b8a31-f1ba-4b4c-b196-a231dc095d13" providerId="ADAL" clId="{6E670754-AB6A-5789-AA0A-6F6FD9CE3EEA}" dt="2026-08-13T21:19:31.382" v="6" actId="20577"/>
+        <pc:sldMkLst>
+          <pc:docMk/>
+          <pc:sldMk cId="2680778242" sldId="547"/>
+        </pc:sldMkLst>
+      </pc:sldChg>
+    </pc:docChg>
+  </pc:docChgLst>
+</pc:chgInfo>
+</file>
+
 <file path=ppt/notesMasters/notesMaster1.xml><?xml version="1.0" encoding="utf-8"?>
 <p:notesMaster xmlns:a="http://schemas.openxmlformats.org/drawingml/2006/main" xmlns:r="http://schemas.openxmlformats.org/officeDocument/2006/relationships" xmlns:p="http://schemas.openxmlformats.org/presentationml/2006/main">
   <p:cSld>
@@ -272,7 +356,7 @@
           <a:p>
             <a:fld id="{EBD6F028-2067-3740-AA48-A91E93570B1D}" type="datetimeFigureOut">
               <a:rPr lang="en-US" smtClean="0"/>
-              <a:t>5/10/26</a:t>
+              <a:t>8/13/26</a:t>
             </a:fld>
             <a:endParaRPr lang="en-US"/>
           </a:p>
@@ -667,939 +751,6 @@
           <a:bodyPr/>
           <a:lstStyle/>
           <a:p>
-            <a:r>
-              <a:rPr lang="en-US" sz="1200" kern="1200" dirty="0">
-                <a:solidFill>
-                  <a:schemeClr val="tx1"/>
-                </a:solidFill>
-                <a:effectLst/>
-                <a:latin typeface="+mn-lt"/>
-                <a:ea typeface="+mn-ea"/>
-                <a:cs typeface="+mn-cs"/>
-              </a:rPr>
-              <a:t>\</a:t>
-            </a:r>
-            <a:r>
-              <a:rPr lang="en-US" sz="1200" kern="1200" dirty="0" err="1">
-                <a:solidFill>
-                  <a:schemeClr val="tx1"/>
-                </a:solidFill>
-                <a:effectLst/>
-                <a:latin typeface="+mn-lt"/>
-                <a:ea typeface="+mn-ea"/>
-                <a:cs typeface="+mn-cs"/>
-              </a:rPr>
-              <a:t>widehat</a:t>
-            </a:r>
-            <a:r>
-              <a:rPr lang="en-US" sz="1200" kern="1200" dirty="0">
-                <a:solidFill>
-                  <a:schemeClr val="tx1"/>
-                </a:solidFill>
-                <a:effectLst/>
-                <a:latin typeface="+mn-lt"/>
-                <a:ea typeface="+mn-ea"/>
-                <a:cs typeface="+mn-cs"/>
-              </a:rPr>
-              <a:t>\</a:t>
-            </a:r>
-            <a:r>
-              <a:rPr lang="en-US" sz="1200" kern="1200" dirty="0" err="1">
-                <a:solidFill>
-                  <a:schemeClr val="tx1"/>
-                </a:solidFill>
-                <a:effectLst/>
-                <a:latin typeface="+mn-lt"/>
-                <a:ea typeface="+mn-ea"/>
-                <a:cs typeface="+mn-cs"/>
-              </a:rPr>
-              <a:t>btheta</a:t>
-            </a:r>
-            <a:r>
-              <a:rPr lang="en-US" sz="1200" kern="1200" dirty="0">
-                <a:solidFill>
-                  <a:schemeClr val="tx1"/>
-                </a:solidFill>
-                <a:effectLst/>
-                <a:latin typeface="+mn-lt"/>
-                <a:ea typeface="+mn-ea"/>
-                <a:cs typeface="+mn-cs"/>
-              </a:rPr>
-              <a:t> &amp;= (Z^T Z)^{-1}Z^T\y\\</a:t>
-            </a:r>
-          </a:p>
-          <a:p>
-            <a:r>
-              <a:rPr lang="en-US" sz="1200" kern="1200" dirty="0">
-                <a:solidFill>
-                  <a:schemeClr val="tx1"/>
-                </a:solidFill>
-                <a:effectLst/>
-                <a:latin typeface="+mn-lt"/>
-                <a:ea typeface="+mn-ea"/>
-                <a:cs typeface="+mn-cs"/>
-              </a:rPr>
-              <a:t>                &amp;= (Z^T Z)^{-1}Z^T(Z\</a:t>
-            </a:r>
-            <a:r>
-              <a:rPr lang="en-US" sz="1200" kern="1200" dirty="0" err="1">
-                <a:solidFill>
-                  <a:schemeClr val="tx1"/>
-                </a:solidFill>
-                <a:effectLst/>
-                <a:latin typeface="+mn-lt"/>
-                <a:ea typeface="+mn-ea"/>
-                <a:cs typeface="+mn-cs"/>
-              </a:rPr>
-              <a:t>btheta</a:t>
-            </a:r>
-            <a:r>
-              <a:rPr lang="en-US" sz="1200" kern="1200" dirty="0">
-                <a:solidFill>
-                  <a:schemeClr val="tx1"/>
-                </a:solidFill>
-                <a:effectLst/>
-                <a:latin typeface="+mn-lt"/>
-                <a:ea typeface="+mn-ea"/>
-                <a:cs typeface="+mn-cs"/>
-              </a:rPr>
-              <a:t> + \</a:t>
-            </a:r>
-            <a:r>
-              <a:rPr lang="en-US" sz="1200" kern="1200" dirty="0" err="1">
-                <a:solidFill>
-                  <a:schemeClr val="tx1"/>
-                </a:solidFill>
-                <a:effectLst/>
-                <a:latin typeface="+mn-lt"/>
-                <a:ea typeface="+mn-ea"/>
-                <a:cs typeface="+mn-cs"/>
-              </a:rPr>
-              <a:t>beps</a:t>
-            </a:r>
-            <a:r>
-              <a:rPr lang="en-US" sz="1200" kern="1200" dirty="0">
-                <a:solidFill>
-                  <a:schemeClr val="tx1"/>
-                </a:solidFill>
-                <a:effectLst/>
-                <a:latin typeface="+mn-lt"/>
-                <a:ea typeface="+mn-ea"/>
-                <a:cs typeface="+mn-cs"/>
-              </a:rPr>
-              <a:t>)\\</a:t>
-            </a:r>
-          </a:p>
-          <a:p>
-            <a:r>
-              <a:rPr lang="en-US" sz="1200" kern="1200" dirty="0">
-                <a:solidFill>
-                  <a:schemeClr val="tx1"/>
-                </a:solidFill>
-                <a:effectLst/>
-                <a:latin typeface="+mn-lt"/>
-                <a:ea typeface="+mn-ea"/>
-                <a:cs typeface="+mn-cs"/>
-              </a:rPr>
-              <a:t>                &amp;= \</a:t>
-            </a:r>
-            <a:r>
-              <a:rPr lang="en-US" sz="1200" kern="1200" dirty="0" err="1">
-                <a:solidFill>
-                  <a:schemeClr val="tx1"/>
-                </a:solidFill>
-                <a:effectLst/>
-                <a:latin typeface="+mn-lt"/>
-                <a:ea typeface="+mn-ea"/>
-                <a:cs typeface="+mn-cs"/>
-              </a:rPr>
-              <a:t>btheta</a:t>
-            </a:r>
-            <a:r>
-              <a:rPr lang="en-US" sz="1200" kern="1200" dirty="0">
-                <a:solidFill>
-                  <a:schemeClr val="tx1"/>
-                </a:solidFill>
-                <a:effectLst/>
-                <a:latin typeface="+mn-lt"/>
-                <a:ea typeface="+mn-ea"/>
-                <a:cs typeface="+mn-cs"/>
-              </a:rPr>
-              <a:t> + (Z^T Z)^{-1}Z^T\</a:t>
-            </a:r>
-            <a:r>
-              <a:rPr lang="en-US" sz="1200" kern="1200" dirty="0" err="1">
-                <a:solidFill>
-                  <a:schemeClr val="tx1"/>
-                </a:solidFill>
-                <a:effectLst/>
-                <a:latin typeface="+mn-lt"/>
-                <a:ea typeface="+mn-ea"/>
-                <a:cs typeface="+mn-cs"/>
-              </a:rPr>
-              <a:t>beps</a:t>
-            </a:r>
-            <a:endParaRPr lang="en-US" sz="1200" kern="1200" dirty="0">
-              <a:solidFill>
-                <a:schemeClr val="tx1"/>
-              </a:solidFill>
-              <a:effectLst/>
-              <a:latin typeface="+mn-lt"/>
-              <a:ea typeface="+mn-ea"/>
-              <a:cs typeface="+mn-cs"/>
-            </a:endParaRPr>
-          </a:p>
-          <a:p>
-            <a:endParaRPr lang="en-US" sz="1200" kern="1200" dirty="0">
-              <a:solidFill>
-                <a:schemeClr val="tx1"/>
-              </a:solidFill>
-              <a:effectLst/>
-              <a:latin typeface="+mn-lt"/>
-              <a:ea typeface="+mn-ea"/>
-              <a:cs typeface="+mn-cs"/>
-            </a:endParaRPr>
-          </a:p>
-          <a:p>
-            <a:endParaRPr lang="en-US" sz="1200" kern="1200" dirty="0">
-              <a:solidFill>
-                <a:schemeClr val="tx1"/>
-              </a:solidFill>
-              <a:effectLst/>
-              <a:latin typeface="+mn-lt"/>
-              <a:ea typeface="+mn-ea"/>
-              <a:cs typeface="+mn-cs"/>
-            </a:endParaRPr>
-          </a:p>
-          <a:p>
-            <a:endParaRPr lang="en-US" sz="1200" kern="1200" dirty="0">
-              <a:solidFill>
-                <a:schemeClr val="tx1"/>
-              </a:solidFill>
-              <a:effectLst/>
-              <a:latin typeface="+mn-lt"/>
-              <a:ea typeface="+mn-ea"/>
-              <a:cs typeface="+mn-cs"/>
-            </a:endParaRPr>
-          </a:p>
-          <a:p>
-            <a:r>
-              <a:rPr lang="en-US" sz="1200" kern="1200" dirty="0">
-                <a:solidFill>
-                  <a:schemeClr val="tx1"/>
-                </a:solidFill>
-                <a:effectLst/>
-                <a:latin typeface="+mn-lt"/>
-                <a:ea typeface="+mn-ea"/>
-                <a:cs typeface="+mn-cs"/>
-              </a:rPr>
-              <a:t>\E[\</a:t>
-            </a:r>
-            <a:r>
-              <a:rPr lang="en-US" sz="1200" kern="1200" dirty="0" err="1">
-                <a:solidFill>
-                  <a:schemeClr val="tx1"/>
-                </a:solidFill>
-                <a:effectLst/>
-                <a:latin typeface="+mn-lt"/>
-                <a:ea typeface="+mn-ea"/>
-                <a:cs typeface="+mn-cs"/>
-              </a:rPr>
-              <a:t>widehat</a:t>
-            </a:r>
-            <a:r>
-              <a:rPr lang="en-US" sz="1200" kern="1200" dirty="0">
-                <a:solidFill>
-                  <a:schemeClr val="tx1"/>
-                </a:solidFill>
-                <a:effectLst/>
-                <a:latin typeface="+mn-lt"/>
-                <a:ea typeface="+mn-ea"/>
-                <a:cs typeface="+mn-cs"/>
-              </a:rPr>
-              <a:t>\</a:t>
-            </a:r>
-            <a:r>
-              <a:rPr lang="en-US" sz="1200" kern="1200" dirty="0" err="1">
-                <a:solidFill>
-                  <a:schemeClr val="tx1"/>
-                </a:solidFill>
-                <a:effectLst/>
-                <a:latin typeface="+mn-lt"/>
-                <a:ea typeface="+mn-ea"/>
-                <a:cs typeface="+mn-cs"/>
-              </a:rPr>
-              <a:t>btheta</a:t>
-            </a:r>
-            <a:r>
-              <a:rPr lang="en-US" sz="1200" kern="1200" dirty="0">
-                <a:solidFill>
-                  <a:schemeClr val="tx1"/>
-                </a:solidFill>
-                <a:effectLst/>
-                <a:latin typeface="+mn-lt"/>
-                <a:ea typeface="+mn-ea"/>
-                <a:cs typeface="+mn-cs"/>
-              </a:rPr>
-              <a:t>] &amp;= \E[\</a:t>
-            </a:r>
-            <a:r>
-              <a:rPr lang="en-US" sz="1200" kern="1200" dirty="0" err="1">
-                <a:solidFill>
-                  <a:schemeClr val="tx1"/>
-                </a:solidFill>
-                <a:effectLst/>
-                <a:latin typeface="+mn-lt"/>
-                <a:ea typeface="+mn-ea"/>
-                <a:cs typeface="+mn-cs"/>
-              </a:rPr>
-              <a:t>btheta</a:t>
-            </a:r>
-            <a:r>
-              <a:rPr lang="en-US" sz="1200" kern="1200" dirty="0">
-                <a:solidFill>
-                  <a:schemeClr val="tx1"/>
-                </a:solidFill>
-                <a:effectLst/>
-                <a:latin typeface="+mn-lt"/>
-                <a:ea typeface="+mn-ea"/>
-                <a:cs typeface="+mn-cs"/>
-              </a:rPr>
-              <a:t> + (Z^T Z)^{-1}Z^T\</a:t>
-            </a:r>
-            <a:r>
-              <a:rPr lang="en-US" sz="1200" kern="1200" dirty="0" err="1">
-                <a:solidFill>
-                  <a:schemeClr val="tx1"/>
-                </a:solidFill>
-                <a:effectLst/>
-                <a:latin typeface="+mn-lt"/>
-                <a:ea typeface="+mn-ea"/>
-                <a:cs typeface="+mn-cs"/>
-              </a:rPr>
-              <a:t>beps</a:t>
-            </a:r>
-            <a:r>
-              <a:rPr lang="en-US" sz="1200" kern="1200" dirty="0">
-                <a:solidFill>
-                  <a:schemeClr val="tx1"/>
-                </a:solidFill>
-                <a:effectLst/>
-                <a:latin typeface="+mn-lt"/>
-                <a:ea typeface="+mn-ea"/>
-                <a:cs typeface="+mn-cs"/>
-              </a:rPr>
-              <a:t>]\\</a:t>
-            </a:r>
-          </a:p>
-          <a:p>
-            <a:r>
-              <a:rPr lang="en-US" sz="1200" kern="1200" dirty="0">
-                <a:solidFill>
-                  <a:schemeClr val="tx1"/>
-                </a:solidFill>
-                <a:effectLst/>
-                <a:latin typeface="+mn-lt"/>
-                <a:ea typeface="+mn-ea"/>
-                <a:cs typeface="+mn-cs"/>
-              </a:rPr>
-              <a:t>                    &amp;= \</a:t>
-            </a:r>
-            <a:r>
-              <a:rPr lang="en-US" sz="1200" kern="1200" dirty="0" err="1">
-                <a:solidFill>
-                  <a:schemeClr val="tx1"/>
-                </a:solidFill>
-                <a:effectLst/>
-                <a:latin typeface="+mn-lt"/>
-                <a:ea typeface="+mn-ea"/>
-                <a:cs typeface="+mn-cs"/>
-              </a:rPr>
-              <a:t>btheta</a:t>
-            </a:r>
-            <a:r>
-              <a:rPr lang="en-US" sz="1200" kern="1200" dirty="0">
-                <a:solidFill>
-                  <a:schemeClr val="tx1"/>
-                </a:solidFill>
-                <a:effectLst/>
-                <a:latin typeface="+mn-lt"/>
-                <a:ea typeface="+mn-ea"/>
-                <a:cs typeface="+mn-cs"/>
-              </a:rPr>
-              <a:t> + (Z^T Z)^{-1}Z^T\E[\</a:t>
-            </a:r>
-            <a:r>
-              <a:rPr lang="en-US" sz="1200" kern="1200" dirty="0" err="1">
-                <a:solidFill>
-                  <a:schemeClr val="tx1"/>
-                </a:solidFill>
-                <a:effectLst/>
-                <a:latin typeface="+mn-lt"/>
-                <a:ea typeface="+mn-ea"/>
-                <a:cs typeface="+mn-cs"/>
-              </a:rPr>
-              <a:t>beps</a:t>
-            </a:r>
-            <a:r>
-              <a:rPr lang="en-US" sz="1200" kern="1200" dirty="0">
-                <a:solidFill>
-                  <a:schemeClr val="tx1"/>
-                </a:solidFill>
-                <a:effectLst/>
-                <a:latin typeface="+mn-lt"/>
-                <a:ea typeface="+mn-ea"/>
-                <a:cs typeface="+mn-cs"/>
-              </a:rPr>
-              <a:t>]\\</a:t>
-            </a:r>
-          </a:p>
-          <a:p>
-            <a:r>
-              <a:rPr lang="en-US" sz="1200" kern="1200" dirty="0">
-                <a:solidFill>
-                  <a:schemeClr val="tx1"/>
-                </a:solidFill>
-                <a:effectLst/>
-                <a:latin typeface="+mn-lt"/>
-                <a:ea typeface="+mn-ea"/>
-                <a:cs typeface="+mn-cs"/>
-              </a:rPr>
-              <a:t>                    &amp;= \</a:t>
-            </a:r>
-            <a:r>
-              <a:rPr lang="en-US" sz="1200" kern="1200" dirty="0" err="1">
-                <a:solidFill>
-                  <a:schemeClr val="tx1"/>
-                </a:solidFill>
-                <a:effectLst/>
-                <a:latin typeface="+mn-lt"/>
-                <a:ea typeface="+mn-ea"/>
-                <a:cs typeface="+mn-cs"/>
-              </a:rPr>
-              <a:t>btheta</a:t>
-            </a:r>
-            <a:endParaRPr lang="en-US" sz="1200" kern="1200" dirty="0">
-              <a:solidFill>
-                <a:schemeClr val="tx1"/>
-              </a:solidFill>
-              <a:effectLst/>
-              <a:latin typeface="+mn-lt"/>
-              <a:ea typeface="+mn-ea"/>
-              <a:cs typeface="+mn-cs"/>
-            </a:endParaRPr>
-          </a:p>
-          <a:p>
-            <a:endParaRPr lang="en-US" sz="1200" kern="1200" dirty="0">
-              <a:solidFill>
-                <a:schemeClr val="tx1"/>
-              </a:solidFill>
-              <a:effectLst/>
-              <a:latin typeface="+mn-lt"/>
-              <a:ea typeface="+mn-ea"/>
-              <a:cs typeface="+mn-cs"/>
-            </a:endParaRPr>
-          </a:p>
-          <a:p>
-            <a:endParaRPr lang="en-US" sz="1200" kern="1200" dirty="0">
-              <a:solidFill>
-                <a:schemeClr val="tx1"/>
-              </a:solidFill>
-              <a:effectLst/>
-              <a:latin typeface="+mn-lt"/>
-              <a:ea typeface="+mn-ea"/>
-              <a:cs typeface="+mn-cs"/>
-            </a:endParaRPr>
-          </a:p>
-          <a:p>
-            <a:r>
-              <a:rPr lang="en-US" sz="1200" kern="1200" dirty="0">
-                <a:solidFill>
-                  <a:schemeClr val="tx1"/>
-                </a:solidFill>
-                <a:effectLst/>
-                <a:latin typeface="+mn-lt"/>
-                <a:ea typeface="+mn-ea"/>
-                <a:cs typeface="+mn-cs"/>
-              </a:rPr>
-              <a:t>\</a:t>
-            </a:r>
-            <a:r>
-              <a:rPr lang="en-US" sz="1200" kern="1200" dirty="0" err="1">
-                <a:solidFill>
-                  <a:schemeClr val="tx1"/>
-                </a:solidFill>
-                <a:effectLst/>
-                <a:latin typeface="+mn-lt"/>
-                <a:ea typeface="+mn-ea"/>
-                <a:cs typeface="+mn-cs"/>
-              </a:rPr>
-              <a:t>cov</a:t>
-            </a:r>
-            <a:r>
-              <a:rPr lang="en-US" sz="1200" kern="1200" dirty="0">
-                <a:solidFill>
-                  <a:schemeClr val="tx1"/>
-                </a:solidFill>
-                <a:effectLst/>
-                <a:latin typeface="+mn-lt"/>
-                <a:ea typeface="+mn-ea"/>
-                <a:cs typeface="+mn-cs"/>
-              </a:rPr>
-              <a:t>[\</a:t>
-            </a:r>
-            <a:r>
-              <a:rPr lang="en-US" sz="1200" kern="1200" dirty="0" err="1">
-                <a:solidFill>
-                  <a:schemeClr val="tx1"/>
-                </a:solidFill>
-                <a:effectLst/>
-                <a:latin typeface="+mn-lt"/>
-                <a:ea typeface="+mn-ea"/>
-                <a:cs typeface="+mn-cs"/>
-              </a:rPr>
-              <a:t>widehat</a:t>
-            </a:r>
-            <a:r>
-              <a:rPr lang="en-US" sz="1200" kern="1200" dirty="0">
-                <a:solidFill>
-                  <a:schemeClr val="tx1"/>
-                </a:solidFill>
-                <a:effectLst/>
-                <a:latin typeface="+mn-lt"/>
-                <a:ea typeface="+mn-ea"/>
-                <a:cs typeface="+mn-cs"/>
-              </a:rPr>
-              <a:t>\</a:t>
-            </a:r>
-            <a:r>
-              <a:rPr lang="en-US" sz="1200" kern="1200" dirty="0" err="1">
-                <a:solidFill>
-                  <a:schemeClr val="tx1"/>
-                </a:solidFill>
-                <a:effectLst/>
-                <a:latin typeface="+mn-lt"/>
-                <a:ea typeface="+mn-ea"/>
-                <a:cs typeface="+mn-cs"/>
-              </a:rPr>
-              <a:t>btheta</a:t>
-            </a:r>
-            <a:r>
-              <a:rPr lang="en-US" sz="1200" kern="1200" dirty="0">
-                <a:solidFill>
-                  <a:schemeClr val="tx1"/>
-                </a:solidFill>
-                <a:effectLst/>
-                <a:latin typeface="+mn-lt"/>
-                <a:ea typeface="+mn-ea"/>
-                <a:cs typeface="+mn-cs"/>
-              </a:rPr>
-              <a:t>] &amp;= \</a:t>
-            </a:r>
-            <a:r>
-              <a:rPr lang="en-US" sz="1200" kern="1200" dirty="0" err="1">
-                <a:solidFill>
-                  <a:schemeClr val="tx1"/>
-                </a:solidFill>
-                <a:effectLst/>
-                <a:latin typeface="+mn-lt"/>
-                <a:ea typeface="+mn-ea"/>
-                <a:cs typeface="+mn-cs"/>
-              </a:rPr>
-              <a:t>cov</a:t>
-            </a:r>
-            <a:r>
-              <a:rPr lang="en-US" sz="1200" kern="1200" dirty="0">
-                <a:solidFill>
-                  <a:schemeClr val="tx1"/>
-                </a:solidFill>
-                <a:effectLst/>
-                <a:latin typeface="+mn-lt"/>
-                <a:ea typeface="+mn-ea"/>
-                <a:cs typeface="+mn-cs"/>
-              </a:rPr>
-              <a:t>[\</a:t>
-            </a:r>
-            <a:r>
-              <a:rPr lang="en-US" sz="1200" kern="1200" dirty="0" err="1">
-                <a:solidFill>
-                  <a:schemeClr val="tx1"/>
-                </a:solidFill>
-                <a:effectLst/>
-                <a:latin typeface="+mn-lt"/>
-                <a:ea typeface="+mn-ea"/>
-                <a:cs typeface="+mn-cs"/>
-              </a:rPr>
-              <a:t>btheta</a:t>
-            </a:r>
-            <a:r>
-              <a:rPr lang="en-US" sz="1200" kern="1200" dirty="0">
-                <a:solidFill>
-                  <a:schemeClr val="tx1"/>
-                </a:solidFill>
-                <a:effectLst/>
-                <a:latin typeface="+mn-lt"/>
-                <a:ea typeface="+mn-ea"/>
-                <a:cs typeface="+mn-cs"/>
-              </a:rPr>
-              <a:t> + (Z^T Z)^{-1}Z^T\</a:t>
-            </a:r>
-            <a:r>
-              <a:rPr lang="en-US" sz="1200" kern="1200" dirty="0" err="1">
-                <a:solidFill>
-                  <a:schemeClr val="tx1"/>
-                </a:solidFill>
-                <a:effectLst/>
-                <a:latin typeface="+mn-lt"/>
-                <a:ea typeface="+mn-ea"/>
-                <a:cs typeface="+mn-cs"/>
-              </a:rPr>
-              <a:t>beps</a:t>
-            </a:r>
-            <a:r>
-              <a:rPr lang="en-US" sz="1200" kern="1200" dirty="0">
-                <a:solidFill>
-                  <a:schemeClr val="tx1"/>
-                </a:solidFill>
-                <a:effectLst/>
-                <a:latin typeface="+mn-lt"/>
-                <a:ea typeface="+mn-ea"/>
-                <a:cs typeface="+mn-cs"/>
-              </a:rPr>
-              <a:t>]\\</a:t>
-            </a:r>
-          </a:p>
-          <a:p>
-            <a:r>
-              <a:rPr lang="en-US" sz="1200" kern="1200" dirty="0">
-                <a:solidFill>
-                  <a:schemeClr val="tx1"/>
-                </a:solidFill>
-                <a:effectLst/>
-                <a:latin typeface="+mn-lt"/>
-                <a:ea typeface="+mn-ea"/>
-                <a:cs typeface="+mn-cs"/>
-              </a:rPr>
-              <a:t>                      &amp;= (Z^T Z)^{-1}Z^T\</a:t>
-            </a:r>
-            <a:r>
-              <a:rPr lang="en-US" sz="1200" kern="1200" dirty="0" err="1">
-                <a:solidFill>
-                  <a:schemeClr val="tx1"/>
-                </a:solidFill>
-                <a:effectLst/>
-                <a:latin typeface="+mn-lt"/>
-                <a:ea typeface="+mn-ea"/>
-                <a:cs typeface="+mn-cs"/>
-              </a:rPr>
-              <a:t>cov</a:t>
-            </a:r>
-            <a:r>
-              <a:rPr lang="en-US" sz="1200" kern="1200" dirty="0">
-                <a:solidFill>
-                  <a:schemeClr val="tx1"/>
-                </a:solidFill>
-                <a:effectLst/>
-                <a:latin typeface="+mn-lt"/>
-                <a:ea typeface="+mn-ea"/>
-                <a:cs typeface="+mn-cs"/>
-              </a:rPr>
-              <a:t>[\</a:t>
-            </a:r>
-            <a:r>
-              <a:rPr lang="en-US" sz="1200" kern="1200" dirty="0" err="1">
-                <a:solidFill>
-                  <a:schemeClr val="tx1"/>
-                </a:solidFill>
-                <a:effectLst/>
-                <a:latin typeface="+mn-lt"/>
-                <a:ea typeface="+mn-ea"/>
-                <a:cs typeface="+mn-cs"/>
-              </a:rPr>
-              <a:t>beps</a:t>
-            </a:r>
-            <a:r>
-              <a:rPr lang="en-US" sz="1200" kern="1200" dirty="0">
-                <a:solidFill>
-                  <a:schemeClr val="tx1"/>
-                </a:solidFill>
-                <a:effectLst/>
-                <a:latin typeface="+mn-lt"/>
-                <a:ea typeface="+mn-ea"/>
-                <a:cs typeface="+mn-cs"/>
-              </a:rPr>
-              <a:t>]Z(Z^T Z)^{-1}\\</a:t>
-            </a:r>
-          </a:p>
-          <a:p>
-            <a:r>
-              <a:rPr lang="en-US" sz="1200" kern="1200" dirty="0">
-                <a:solidFill>
-                  <a:schemeClr val="tx1"/>
-                </a:solidFill>
-                <a:effectLst/>
-                <a:latin typeface="+mn-lt"/>
-                <a:ea typeface="+mn-ea"/>
-                <a:cs typeface="+mn-cs"/>
-              </a:rPr>
-              <a:t>                      &amp;= \sigma^2 (Z^T Z)^{-1}\\</a:t>
-            </a:r>
-          </a:p>
-          <a:p>
-            <a:r>
-              <a:rPr lang="en-US" sz="1200" kern="1200" dirty="0">
-                <a:solidFill>
-                  <a:schemeClr val="tx1"/>
-                </a:solidFill>
-                <a:effectLst/>
-                <a:latin typeface="+mn-lt"/>
-                <a:ea typeface="+mn-ea"/>
-                <a:cs typeface="+mn-cs"/>
-              </a:rPr>
-              <a:t>                      &amp;= \sigma^2 \left(\sum_{</a:t>
-            </a:r>
-            <a:r>
-              <a:rPr lang="en-US" sz="1200" kern="1200" dirty="0" err="1">
-                <a:solidFill>
-                  <a:schemeClr val="tx1"/>
-                </a:solidFill>
-                <a:effectLst/>
-                <a:latin typeface="+mn-lt"/>
-                <a:ea typeface="+mn-ea"/>
-                <a:cs typeface="+mn-cs"/>
-              </a:rPr>
-              <a:t>i</a:t>
-            </a:r>
-            <a:r>
-              <a:rPr lang="en-US" sz="1200" kern="1200" dirty="0">
-                <a:solidFill>
-                  <a:schemeClr val="tx1"/>
-                </a:solidFill>
-                <a:effectLst/>
-                <a:latin typeface="+mn-lt"/>
-                <a:ea typeface="+mn-ea"/>
-                <a:cs typeface="+mn-cs"/>
-              </a:rPr>
-              <a:t>=1}^N \</a:t>
-            </a:r>
-            <a:r>
-              <a:rPr lang="en-US" sz="1200" kern="1200" dirty="0" err="1">
-                <a:solidFill>
-                  <a:schemeClr val="tx1"/>
-                </a:solidFill>
-                <a:effectLst/>
-                <a:latin typeface="+mn-lt"/>
-                <a:ea typeface="+mn-ea"/>
-                <a:cs typeface="+mn-cs"/>
-              </a:rPr>
-              <a:t>z_i</a:t>
-            </a:r>
-            <a:r>
-              <a:rPr lang="en-US" sz="1200" kern="1200" dirty="0">
-                <a:solidFill>
-                  <a:schemeClr val="tx1"/>
-                </a:solidFill>
-                <a:effectLst/>
-                <a:latin typeface="+mn-lt"/>
-                <a:ea typeface="+mn-ea"/>
-                <a:cs typeface="+mn-cs"/>
-              </a:rPr>
-              <a:t> \</a:t>
-            </a:r>
-            <a:r>
-              <a:rPr lang="en-US" sz="1200" kern="1200" dirty="0" err="1">
-                <a:solidFill>
-                  <a:schemeClr val="tx1"/>
-                </a:solidFill>
-                <a:effectLst/>
-                <a:latin typeface="+mn-lt"/>
-                <a:ea typeface="+mn-ea"/>
-                <a:cs typeface="+mn-cs"/>
-              </a:rPr>
-              <a:t>z_i^T</a:t>
-            </a:r>
-            <a:r>
-              <a:rPr lang="en-US" sz="1200" kern="1200" dirty="0">
-                <a:solidFill>
-                  <a:schemeClr val="tx1"/>
-                </a:solidFill>
-                <a:effectLst/>
-                <a:latin typeface="+mn-lt"/>
-                <a:ea typeface="+mn-ea"/>
-                <a:cs typeface="+mn-cs"/>
-              </a:rPr>
-              <a:t>\right)^{-1} = \sigma^2 \left(\sum_{</a:t>
-            </a:r>
-            <a:r>
-              <a:rPr lang="en-US" sz="1200" kern="1200" dirty="0" err="1">
-                <a:solidFill>
-                  <a:schemeClr val="tx1"/>
-                </a:solidFill>
-                <a:effectLst/>
-                <a:latin typeface="+mn-lt"/>
-                <a:ea typeface="+mn-ea"/>
-                <a:cs typeface="+mn-cs"/>
-              </a:rPr>
-              <a:t>i</a:t>
-            </a:r>
-            <a:r>
-              <a:rPr lang="en-US" sz="1200" kern="1200" dirty="0">
-                <a:solidFill>
-                  <a:schemeClr val="tx1"/>
-                </a:solidFill>
-                <a:effectLst/>
-                <a:latin typeface="+mn-lt"/>
-                <a:ea typeface="+mn-ea"/>
-                <a:cs typeface="+mn-cs"/>
-              </a:rPr>
-              <a:t>=1}^N \begin{</a:t>
-            </a:r>
-            <a:r>
-              <a:rPr lang="en-US" sz="1200" kern="1200" dirty="0" err="1">
-                <a:solidFill>
-                  <a:schemeClr val="tx1"/>
-                </a:solidFill>
-                <a:effectLst/>
-                <a:latin typeface="+mn-lt"/>
-                <a:ea typeface="+mn-ea"/>
-                <a:cs typeface="+mn-cs"/>
-              </a:rPr>
-              <a:t>bmatrix</a:t>
-            </a:r>
-            <a:r>
-              <a:rPr lang="en-US" sz="1200" kern="1200" dirty="0">
-                <a:solidFill>
-                  <a:schemeClr val="tx1"/>
-                </a:solidFill>
-                <a:effectLst/>
-                <a:latin typeface="+mn-lt"/>
-                <a:ea typeface="+mn-ea"/>
-                <a:cs typeface="+mn-cs"/>
-              </a:rPr>
-              <a:t>}x_t^2 &amp; </a:t>
-            </a:r>
-            <a:r>
-              <a:rPr lang="en-US" sz="1200" kern="1200" dirty="0" err="1">
-                <a:solidFill>
-                  <a:schemeClr val="tx1"/>
-                </a:solidFill>
-                <a:effectLst/>
-                <a:latin typeface="+mn-lt"/>
-                <a:ea typeface="+mn-ea"/>
-                <a:cs typeface="+mn-cs"/>
-              </a:rPr>
-              <a:t>x_t</a:t>
-            </a:r>
-            <a:r>
-              <a:rPr lang="en-US" sz="1200" kern="1200" dirty="0">
-                <a:solidFill>
-                  <a:schemeClr val="tx1"/>
-                </a:solidFill>
-                <a:effectLst/>
-                <a:latin typeface="+mn-lt"/>
-                <a:ea typeface="+mn-ea"/>
-                <a:cs typeface="+mn-cs"/>
-              </a:rPr>
-              <a:t> </a:t>
-            </a:r>
-            <a:r>
-              <a:rPr lang="en-US" sz="1200" kern="1200" dirty="0" err="1">
-                <a:solidFill>
-                  <a:schemeClr val="tx1"/>
-                </a:solidFill>
-                <a:effectLst/>
-                <a:latin typeface="+mn-lt"/>
-                <a:ea typeface="+mn-ea"/>
-                <a:cs typeface="+mn-cs"/>
-              </a:rPr>
-              <a:t>u_t</a:t>
-            </a:r>
-            <a:r>
-              <a:rPr lang="en-US" sz="1200" kern="1200" dirty="0">
-                <a:solidFill>
-                  <a:schemeClr val="tx1"/>
-                </a:solidFill>
-                <a:effectLst/>
-                <a:latin typeface="+mn-lt"/>
-                <a:ea typeface="+mn-ea"/>
-                <a:cs typeface="+mn-cs"/>
-              </a:rPr>
-              <a:t> \\ </a:t>
-            </a:r>
-            <a:r>
-              <a:rPr lang="en-US" sz="1200" kern="1200" dirty="0" err="1">
-                <a:solidFill>
-                  <a:schemeClr val="tx1"/>
-                </a:solidFill>
-                <a:effectLst/>
-                <a:latin typeface="+mn-lt"/>
-                <a:ea typeface="+mn-ea"/>
-                <a:cs typeface="+mn-cs"/>
-              </a:rPr>
-              <a:t>x_t</a:t>
-            </a:r>
-            <a:r>
-              <a:rPr lang="en-US" sz="1200" kern="1200" dirty="0">
-                <a:solidFill>
-                  <a:schemeClr val="tx1"/>
-                </a:solidFill>
-                <a:effectLst/>
-                <a:latin typeface="+mn-lt"/>
-                <a:ea typeface="+mn-ea"/>
-                <a:cs typeface="+mn-cs"/>
-              </a:rPr>
-              <a:t> </a:t>
-            </a:r>
-            <a:r>
-              <a:rPr lang="en-US" sz="1200" kern="1200" dirty="0" err="1">
-                <a:solidFill>
-                  <a:schemeClr val="tx1"/>
-                </a:solidFill>
-                <a:effectLst/>
-                <a:latin typeface="+mn-lt"/>
-                <a:ea typeface="+mn-ea"/>
-                <a:cs typeface="+mn-cs"/>
-              </a:rPr>
-              <a:t>u_t</a:t>
-            </a:r>
-            <a:r>
-              <a:rPr lang="en-US" sz="1200" kern="1200" dirty="0">
-                <a:solidFill>
-                  <a:schemeClr val="tx1"/>
-                </a:solidFill>
-                <a:effectLst/>
-                <a:latin typeface="+mn-lt"/>
-                <a:ea typeface="+mn-ea"/>
-                <a:cs typeface="+mn-cs"/>
-              </a:rPr>
-              <a:t> &amp; u_t^2\end{</a:t>
-            </a:r>
-            <a:r>
-              <a:rPr lang="en-US" sz="1200" kern="1200" dirty="0" err="1">
-                <a:solidFill>
-                  <a:schemeClr val="tx1"/>
-                </a:solidFill>
-                <a:effectLst/>
-                <a:latin typeface="+mn-lt"/>
-                <a:ea typeface="+mn-ea"/>
-                <a:cs typeface="+mn-cs"/>
-              </a:rPr>
-              <a:t>bmatrix</a:t>
-            </a:r>
-            <a:r>
-              <a:rPr lang="en-US" sz="1200" kern="1200" dirty="0">
-                <a:solidFill>
-                  <a:schemeClr val="tx1"/>
-                </a:solidFill>
-                <a:effectLst/>
-                <a:latin typeface="+mn-lt"/>
-                <a:ea typeface="+mn-ea"/>
-                <a:cs typeface="+mn-cs"/>
-              </a:rPr>
-              <a:t>}\right)^{-1}</a:t>
-            </a:r>
-          </a:p>
-          <a:p>
             <a:endParaRPr lang="en-US" sz="1200" kern="1200" dirty="0">
               <a:solidFill>
                 <a:schemeClr val="tx1"/>
@@ -1692,10 +843,7 @@
           <a:bodyPr/>
           <a:lstStyle/>
           <a:p>
-            <a:r>
-              <a:rPr lang="en-US" dirty="0"/>
-              <a:t>Give practical examples of a situation where each question arises? </a:t>
-            </a:r>
+            <a:endParaRPr lang="en-US" dirty="0"/>
           </a:p>
         </p:txBody>
       </p:sp>
@@ -1779,95 +927,6 @@
           <a:bodyPr/>
           <a:lstStyle/>
           <a:p>
-            <a:pPr marL="0" marR="0" lvl="0" indent="0" algn="l" defTabSz="914400" rtl="0" eaLnBrk="1" fontAlgn="auto" latinLnBrk="0" hangingPunct="1">
-              <a:lnSpc>
-                <a:spcPct val="100000"/>
-              </a:lnSpc>
-              <a:spcBef>
-                <a:spcPts val="0"/>
-              </a:spcBef>
-              <a:spcAft>
-                <a:spcPts val="0"/>
-              </a:spcAft>
-              <a:buClrTx/>
-              <a:buSzTx/>
-              <a:buFontTx/>
-              <a:buNone/>
-              <a:tabLst/>
-              <a:defRPr/>
-            </a:pPr>
-            <a:r>
-              <a:rPr lang="en-US" sz="1200" kern="1200" dirty="0">
-                <a:solidFill>
-                  <a:schemeClr val="tx1"/>
-                </a:solidFill>
-                <a:effectLst/>
-                <a:latin typeface="+mn-lt"/>
-                <a:ea typeface="+mn-ea"/>
-                <a:cs typeface="+mn-cs"/>
-              </a:rPr>
-              <a:t>m \</a:t>
-            </a:r>
-            <a:r>
-              <a:rPr lang="en-US" sz="1200" kern="1200" dirty="0" err="1">
-                <a:solidFill>
-                  <a:schemeClr val="tx1"/>
-                </a:solidFill>
-                <a:effectLst/>
-                <a:latin typeface="+mn-lt"/>
-                <a:ea typeface="+mn-ea"/>
-                <a:cs typeface="+mn-cs"/>
-              </a:rPr>
-              <a:t>ddot</a:t>
-            </a:r>
-            <a:r>
-              <a:rPr lang="en-US" sz="1200" kern="1200" dirty="0">
-                <a:solidFill>
-                  <a:schemeClr val="tx1"/>
-                </a:solidFill>
-                <a:effectLst/>
-                <a:latin typeface="+mn-lt"/>
-                <a:ea typeface="+mn-ea"/>
-                <a:cs typeface="+mn-cs"/>
-              </a:rPr>
-              <a:t> x + d \dot x + k x = 0</a:t>
-            </a:r>
-          </a:p>
-          <a:p>
-            <a:endParaRPr lang="en-US" dirty="0"/>
-          </a:p>
-          <a:p>
-            <a:endParaRPr lang="en-US" dirty="0"/>
-          </a:p>
-          <a:p>
-            <a:r>
-              <a:rPr lang="en-US" sz="1200" kern="1200" dirty="0">
-                <a:solidFill>
-                  <a:schemeClr val="tx1"/>
-                </a:solidFill>
-                <a:effectLst/>
-                <a:latin typeface="+mn-lt"/>
-                <a:ea typeface="+mn-ea"/>
-                <a:cs typeface="+mn-cs"/>
-              </a:rPr>
-              <a:t>E(x, \dot x) &amp;= \frac{1}{2} k x^2 + \frac{1}{2} m\dot x^2\\</a:t>
-            </a:r>
-          </a:p>
-          <a:p>
-            <a:r>
-              <a:rPr lang="en-US" sz="1200" kern="1200" dirty="0">
-                <a:solidFill>
-                  <a:schemeClr val="tx1"/>
-                </a:solidFill>
-                <a:effectLst/>
-                <a:latin typeface="+mn-lt"/>
-                <a:ea typeface="+mn-ea"/>
-                <a:cs typeface="+mn-cs"/>
-              </a:rPr>
-              <a:t>\implies \frac{d}{dt} E(x, \dot x) &amp;= -d \dot x^2</a:t>
-            </a:r>
-          </a:p>
-          <a:p>
             <a:endParaRPr lang="en-US" dirty="0"/>
           </a:p>
         </p:txBody>
@@ -1952,10 +1011,7 @@
           <a:bodyPr/>
           <a:lstStyle/>
           <a:p>
-            <a:r>
-              <a:rPr lang="en-US" dirty="0"/>
-              <a:t>Why use anything other than MIAC? Stability of adaptive policy methods can be guaranteed without taking intermediate step of guaranteeing convergence of parameter estimates </a:t>
-            </a:r>
+            <a:endParaRPr lang="en-US" dirty="0"/>
           </a:p>
         </p:txBody>
       </p:sp>
@@ -2207,19 +1263,7 @@
           <a:bodyPr/>
           <a:lstStyle/>
           <a:p>
-            <a:r>
-              <a:rPr lang="en-US" dirty="0"/>
-              <a:t>Talk about how learning the Q function takes advantage of bootstrapping but relies on solving a non-convex optimization problem for action selection at each time step. Also, Q learning is still model-free RL</a:t>
-            </a:r>
-          </a:p>
-          <a:p>
             <a:endParaRPr lang="en-US" dirty="0"/>
-          </a:p>
-          <a:p>
-            <a:r>
-              <a:rPr lang="en-US" dirty="0"/>
-              <a:t>Talk about how we can also learn a combination of things</a:t>
-            </a:r>
           </a:p>
         </p:txBody>
       </p:sp>
@@ -2303,19 +1347,7 @@
           <a:bodyPr/>
           <a:lstStyle/>
           <a:p>
-            <a:r>
-              <a:rPr lang="en-US" dirty="0"/>
-              <a:t>Talk about how learning the Q function takes advantage of bootstrapping but relies on solving a non-convex optimization problem for action selection at each time step. Also, Q learning is still model-free RL</a:t>
-            </a:r>
-          </a:p>
-          <a:p>
             <a:endParaRPr lang="en-US" dirty="0"/>
-          </a:p>
-          <a:p>
-            <a:r>
-              <a:rPr lang="en-US" dirty="0"/>
-              <a:t>Talk about how we can also learn a combination of things</a:t>
-            </a:r>
           </a:p>
         </p:txBody>
       </p:sp>
@@ -2399,12 +1431,6 @@
           <a:bodyPr/>
           <a:lstStyle/>
           <a:p>
-            <a:r>
-              <a:rPr lang="en-US" dirty="0"/>
-              <a:t>Mention design of experiments</a:t>
-            </a:r>
-          </a:p>
-          <a:p>
             <a:endParaRPr lang="en-US" dirty="0"/>
           </a:p>
         </p:txBody>
@@ -2489,939 +1515,6 @@
           <a:bodyPr/>
           <a:lstStyle/>
           <a:p>
-            <a:r>
-              <a:rPr lang="en-US" sz="1200" kern="1200" dirty="0">
-                <a:solidFill>
-                  <a:schemeClr val="tx1"/>
-                </a:solidFill>
-                <a:effectLst/>
-                <a:latin typeface="+mn-lt"/>
-                <a:ea typeface="+mn-ea"/>
-                <a:cs typeface="+mn-cs"/>
-              </a:rPr>
-              <a:t>\</a:t>
-            </a:r>
-            <a:r>
-              <a:rPr lang="en-US" sz="1200" kern="1200" dirty="0" err="1">
-                <a:solidFill>
-                  <a:schemeClr val="tx1"/>
-                </a:solidFill>
-                <a:effectLst/>
-                <a:latin typeface="+mn-lt"/>
-                <a:ea typeface="+mn-ea"/>
-                <a:cs typeface="+mn-cs"/>
-              </a:rPr>
-              <a:t>widehat</a:t>
-            </a:r>
-            <a:r>
-              <a:rPr lang="en-US" sz="1200" kern="1200" dirty="0">
-                <a:solidFill>
-                  <a:schemeClr val="tx1"/>
-                </a:solidFill>
-                <a:effectLst/>
-                <a:latin typeface="+mn-lt"/>
-                <a:ea typeface="+mn-ea"/>
-                <a:cs typeface="+mn-cs"/>
-              </a:rPr>
-              <a:t>\</a:t>
-            </a:r>
-            <a:r>
-              <a:rPr lang="en-US" sz="1200" kern="1200" dirty="0" err="1">
-                <a:solidFill>
-                  <a:schemeClr val="tx1"/>
-                </a:solidFill>
-                <a:effectLst/>
-                <a:latin typeface="+mn-lt"/>
-                <a:ea typeface="+mn-ea"/>
-                <a:cs typeface="+mn-cs"/>
-              </a:rPr>
-              <a:t>btheta</a:t>
-            </a:r>
-            <a:r>
-              <a:rPr lang="en-US" sz="1200" kern="1200" dirty="0">
-                <a:solidFill>
-                  <a:schemeClr val="tx1"/>
-                </a:solidFill>
-                <a:effectLst/>
-                <a:latin typeface="+mn-lt"/>
-                <a:ea typeface="+mn-ea"/>
-                <a:cs typeface="+mn-cs"/>
-              </a:rPr>
-              <a:t> &amp;= (Z^T Z)^{-1}Z^T\y\\</a:t>
-            </a:r>
-          </a:p>
-          <a:p>
-            <a:r>
-              <a:rPr lang="en-US" sz="1200" kern="1200" dirty="0">
-                <a:solidFill>
-                  <a:schemeClr val="tx1"/>
-                </a:solidFill>
-                <a:effectLst/>
-                <a:latin typeface="+mn-lt"/>
-                <a:ea typeface="+mn-ea"/>
-                <a:cs typeface="+mn-cs"/>
-              </a:rPr>
-              <a:t>                &amp;= (Z^T Z)^{-1}Z^T(Z\</a:t>
-            </a:r>
-            <a:r>
-              <a:rPr lang="en-US" sz="1200" kern="1200" dirty="0" err="1">
-                <a:solidFill>
-                  <a:schemeClr val="tx1"/>
-                </a:solidFill>
-                <a:effectLst/>
-                <a:latin typeface="+mn-lt"/>
-                <a:ea typeface="+mn-ea"/>
-                <a:cs typeface="+mn-cs"/>
-              </a:rPr>
-              <a:t>btheta</a:t>
-            </a:r>
-            <a:r>
-              <a:rPr lang="en-US" sz="1200" kern="1200" dirty="0">
-                <a:solidFill>
-                  <a:schemeClr val="tx1"/>
-                </a:solidFill>
-                <a:effectLst/>
-                <a:latin typeface="+mn-lt"/>
-                <a:ea typeface="+mn-ea"/>
-                <a:cs typeface="+mn-cs"/>
-              </a:rPr>
-              <a:t> + \</a:t>
-            </a:r>
-            <a:r>
-              <a:rPr lang="en-US" sz="1200" kern="1200" dirty="0" err="1">
-                <a:solidFill>
-                  <a:schemeClr val="tx1"/>
-                </a:solidFill>
-                <a:effectLst/>
-                <a:latin typeface="+mn-lt"/>
-                <a:ea typeface="+mn-ea"/>
-                <a:cs typeface="+mn-cs"/>
-              </a:rPr>
-              <a:t>beps</a:t>
-            </a:r>
-            <a:r>
-              <a:rPr lang="en-US" sz="1200" kern="1200" dirty="0">
-                <a:solidFill>
-                  <a:schemeClr val="tx1"/>
-                </a:solidFill>
-                <a:effectLst/>
-                <a:latin typeface="+mn-lt"/>
-                <a:ea typeface="+mn-ea"/>
-                <a:cs typeface="+mn-cs"/>
-              </a:rPr>
-              <a:t>)\\</a:t>
-            </a:r>
-          </a:p>
-          <a:p>
-            <a:r>
-              <a:rPr lang="en-US" sz="1200" kern="1200" dirty="0">
-                <a:solidFill>
-                  <a:schemeClr val="tx1"/>
-                </a:solidFill>
-                <a:effectLst/>
-                <a:latin typeface="+mn-lt"/>
-                <a:ea typeface="+mn-ea"/>
-                <a:cs typeface="+mn-cs"/>
-              </a:rPr>
-              <a:t>                &amp;= \</a:t>
-            </a:r>
-            <a:r>
-              <a:rPr lang="en-US" sz="1200" kern="1200" dirty="0" err="1">
-                <a:solidFill>
-                  <a:schemeClr val="tx1"/>
-                </a:solidFill>
-                <a:effectLst/>
-                <a:latin typeface="+mn-lt"/>
-                <a:ea typeface="+mn-ea"/>
-                <a:cs typeface="+mn-cs"/>
-              </a:rPr>
-              <a:t>btheta</a:t>
-            </a:r>
-            <a:r>
-              <a:rPr lang="en-US" sz="1200" kern="1200" dirty="0">
-                <a:solidFill>
-                  <a:schemeClr val="tx1"/>
-                </a:solidFill>
-                <a:effectLst/>
-                <a:latin typeface="+mn-lt"/>
-                <a:ea typeface="+mn-ea"/>
-                <a:cs typeface="+mn-cs"/>
-              </a:rPr>
-              <a:t> + (Z^T Z)^{-1}Z^T\</a:t>
-            </a:r>
-            <a:r>
-              <a:rPr lang="en-US" sz="1200" kern="1200" dirty="0" err="1">
-                <a:solidFill>
-                  <a:schemeClr val="tx1"/>
-                </a:solidFill>
-                <a:effectLst/>
-                <a:latin typeface="+mn-lt"/>
-                <a:ea typeface="+mn-ea"/>
-                <a:cs typeface="+mn-cs"/>
-              </a:rPr>
-              <a:t>beps</a:t>
-            </a:r>
-            <a:endParaRPr lang="en-US" sz="1200" kern="1200" dirty="0">
-              <a:solidFill>
-                <a:schemeClr val="tx1"/>
-              </a:solidFill>
-              <a:effectLst/>
-              <a:latin typeface="+mn-lt"/>
-              <a:ea typeface="+mn-ea"/>
-              <a:cs typeface="+mn-cs"/>
-            </a:endParaRPr>
-          </a:p>
-          <a:p>
-            <a:endParaRPr lang="en-US" sz="1200" kern="1200" dirty="0">
-              <a:solidFill>
-                <a:schemeClr val="tx1"/>
-              </a:solidFill>
-              <a:effectLst/>
-              <a:latin typeface="+mn-lt"/>
-              <a:ea typeface="+mn-ea"/>
-              <a:cs typeface="+mn-cs"/>
-            </a:endParaRPr>
-          </a:p>
-          <a:p>
-            <a:endParaRPr lang="en-US" sz="1200" kern="1200" dirty="0">
-              <a:solidFill>
-                <a:schemeClr val="tx1"/>
-              </a:solidFill>
-              <a:effectLst/>
-              <a:latin typeface="+mn-lt"/>
-              <a:ea typeface="+mn-ea"/>
-              <a:cs typeface="+mn-cs"/>
-            </a:endParaRPr>
-          </a:p>
-          <a:p>
-            <a:endParaRPr lang="en-US" sz="1200" kern="1200" dirty="0">
-              <a:solidFill>
-                <a:schemeClr val="tx1"/>
-              </a:solidFill>
-              <a:effectLst/>
-              <a:latin typeface="+mn-lt"/>
-              <a:ea typeface="+mn-ea"/>
-              <a:cs typeface="+mn-cs"/>
-            </a:endParaRPr>
-          </a:p>
-          <a:p>
-            <a:r>
-              <a:rPr lang="en-US" sz="1200" kern="1200" dirty="0">
-                <a:solidFill>
-                  <a:schemeClr val="tx1"/>
-                </a:solidFill>
-                <a:effectLst/>
-                <a:latin typeface="+mn-lt"/>
-                <a:ea typeface="+mn-ea"/>
-                <a:cs typeface="+mn-cs"/>
-              </a:rPr>
-              <a:t>\E[\</a:t>
-            </a:r>
-            <a:r>
-              <a:rPr lang="en-US" sz="1200" kern="1200" dirty="0" err="1">
-                <a:solidFill>
-                  <a:schemeClr val="tx1"/>
-                </a:solidFill>
-                <a:effectLst/>
-                <a:latin typeface="+mn-lt"/>
-                <a:ea typeface="+mn-ea"/>
-                <a:cs typeface="+mn-cs"/>
-              </a:rPr>
-              <a:t>widehat</a:t>
-            </a:r>
-            <a:r>
-              <a:rPr lang="en-US" sz="1200" kern="1200" dirty="0">
-                <a:solidFill>
-                  <a:schemeClr val="tx1"/>
-                </a:solidFill>
-                <a:effectLst/>
-                <a:latin typeface="+mn-lt"/>
-                <a:ea typeface="+mn-ea"/>
-                <a:cs typeface="+mn-cs"/>
-              </a:rPr>
-              <a:t>\</a:t>
-            </a:r>
-            <a:r>
-              <a:rPr lang="en-US" sz="1200" kern="1200" dirty="0" err="1">
-                <a:solidFill>
-                  <a:schemeClr val="tx1"/>
-                </a:solidFill>
-                <a:effectLst/>
-                <a:latin typeface="+mn-lt"/>
-                <a:ea typeface="+mn-ea"/>
-                <a:cs typeface="+mn-cs"/>
-              </a:rPr>
-              <a:t>btheta</a:t>
-            </a:r>
-            <a:r>
-              <a:rPr lang="en-US" sz="1200" kern="1200" dirty="0">
-                <a:solidFill>
-                  <a:schemeClr val="tx1"/>
-                </a:solidFill>
-                <a:effectLst/>
-                <a:latin typeface="+mn-lt"/>
-                <a:ea typeface="+mn-ea"/>
-                <a:cs typeface="+mn-cs"/>
-              </a:rPr>
-              <a:t>] &amp;= \E[\</a:t>
-            </a:r>
-            <a:r>
-              <a:rPr lang="en-US" sz="1200" kern="1200" dirty="0" err="1">
-                <a:solidFill>
-                  <a:schemeClr val="tx1"/>
-                </a:solidFill>
-                <a:effectLst/>
-                <a:latin typeface="+mn-lt"/>
-                <a:ea typeface="+mn-ea"/>
-                <a:cs typeface="+mn-cs"/>
-              </a:rPr>
-              <a:t>btheta</a:t>
-            </a:r>
-            <a:r>
-              <a:rPr lang="en-US" sz="1200" kern="1200" dirty="0">
-                <a:solidFill>
-                  <a:schemeClr val="tx1"/>
-                </a:solidFill>
-                <a:effectLst/>
-                <a:latin typeface="+mn-lt"/>
-                <a:ea typeface="+mn-ea"/>
-                <a:cs typeface="+mn-cs"/>
-              </a:rPr>
-              <a:t> + (Z^T Z)^{-1}Z^T\</a:t>
-            </a:r>
-            <a:r>
-              <a:rPr lang="en-US" sz="1200" kern="1200" dirty="0" err="1">
-                <a:solidFill>
-                  <a:schemeClr val="tx1"/>
-                </a:solidFill>
-                <a:effectLst/>
-                <a:latin typeface="+mn-lt"/>
-                <a:ea typeface="+mn-ea"/>
-                <a:cs typeface="+mn-cs"/>
-              </a:rPr>
-              <a:t>beps</a:t>
-            </a:r>
-            <a:r>
-              <a:rPr lang="en-US" sz="1200" kern="1200" dirty="0">
-                <a:solidFill>
-                  <a:schemeClr val="tx1"/>
-                </a:solidFill>
-                <a:effectLst/>
-                <a:latin typeface="+mn-lt"/>
-                <a:ea typeface="+mn-ea"/>
-                <a:cs typeface="+mn-cs"/>
-              </a:rPr>
-              <a:t>]\\</a:t>
-            </a:r>
-          </a:p>
-          <a:p>
-            <a:r>
-              <a:rPr lang="en-US" sz="1200" kern="1200" dirty="0">
-                <a:solidFill>
-                  <a:schemeClr val="tx1"/>
-                </a:solidFill>
-                <a:effectLst/>
-                <a:latin typeface="+mn-lt"/>
-                <a:ea typeface="+mn-ea"/>
-                <a:cs typeface="+mn-cs"/>
-              </a:rPr>
-              <a:t>                    &amp;= \</a:t>
-            </a:r>
-            <a:r>
-              <a:rPr lang="en-US" sz="1200" kern="1200" dirty="0" err="1">
-                <a:solidFill>
-                  <a:schemeClr val="tx1"/>
-                </a:solidFill>
-                <a:effectLst/>
-                <a:latin typeface="+mn-lt"/>
-                <a:ea typeface="+mn-ea"/>
-                <a:cs typeface="+mn-cs"/>
-              </a:rPr>
-              <a:t>btheta</a:t>
-            </a:r>
-            <a:r>
-              <a:rPr lang="en-US" sz="1200" kern="1200" dirty="0">
-                <a:solidFill>
-                  <a:schemeClr val="tx1"/>
-                </a:solidFill>
-                <a:effectLst/>
-                <a:latin typeface="+mn-lt"/>
-                <a:ea typeface="+mn-ea"/>
-                <a:cs typeface="+mn-cs"/>
-              </a:rPr>
-              <a:t> + (Z^T Z)^{-1}Z^T\E[\</a:t>
-            </a:r>
-            <a:r>
-              <a:rPr lang="en-US" sz="1200" kern="1200" dirty="0" err="1">
-                <a:solidFill>
-                  <a:schemeClr val="tx1"/>
-                </a:solidFill>
-                <a:effectLst/>
-                <a:latin typeface="+mn-lt"/>
-                <a:ea typeface="+mn-ea"/>
-                <a:cs typeface="+mn-cs"/>
-              </a:rPr>
-              <a:t>beps</a:t>
-            </a:r>
-            <a:r>
-              <a:rPr lang="en-US" sz="1200" kern="1200" dirty="0">
-                <a:solidFill>
-                  <a:schemeClr val="tx1"/>
-                </a:solidFill>
-                <a:effectLst/>
-                <a:latin typeface="+mn-lt"/>
-                <a:ea typeface="+mn-ea"/>
-                <a:cs typeface="+mn-cs"/>
-              </a:rPr>
-              <a:t>]\\</a:t>
-            </a:r>
-          </a:p>
-          <a:p>
-            <a:r>
-              <a:rPr lang="en-US" sz="1200" kern="1200" dirty="0">
-                <a:solidFill>
-                  <a:schemeClr val="tx1"/>
-                </a:solidFill>
-                <a:effectLst/>
-                <a:latin typeface="+mn-lt"/>
-                <a:ea typeface="+mn-ea"/>
-                <a:cs typeface="+mn-cs"/>
-              </a:rPr>
-              <a:t>                    &amp;= \</a:t>
-            </a:r>
-            <a:r>
-              <a:rPr lang="en-US" sz="1200" kern="1200" dirty="0" err="1">
-                <a:solidFill>
-                  <a:schemeClr val="tx1"/>
-                </a:solidFill>
-                <a:effectLst/>
-                <a:latin typeface="+mn-lt"/>
-                <a:ea typeface="+mn-ea"/>
-                <a:cs typeface="+mn-cs"/>
-              </a:rPr>
-              <a:t>btheta</a:t>
-            </a:r>
-            <a:endParaRPr lang="en-US" sz="1200" kern="1200" dirty="0">
-              <a:solidFill>
-                <a:schemeClr val="tx1"/>
-              </a:solidFill>
-              <a:effectLst/>
-              <a:latin typeface="+mn-lt"/>
-              <a:ea typeface="+mn-ea"/>
-              <a:cs typeface="+mn-cs"/>
-            </a:endParaRPr>
-          </a:p>
-          <a:p>
-            <a:endParaRPr lang="en-US" sz="1200" kern="1200" dirty="0">
-              <a:solidFill>
-                <a:schemeClr val="tx1"/>
-              </a:solidFill>
-              <a:effectLst/>
-              <a:latin typeface="+mn-lt"/>
-              <a:ea typeface="+mn-ea"/>
-              <a:cs typeface="+mn-cs"/>
-            </a:endParaRPr>
-          </a:p>
-          <a:p>
-            <a:endParaRPr lang="en-US" sz="1200" kern="1200" dirty="0">
-              <a:solidFill>
-                <a:schemeClr val="tx1"/>
-              </a:solidFill>
-              <a:effectLst/>
-              <a:latin typeface="+mn-lt"/>
-              <a:ea typeface="+mn-ea"/>
-              <a:cs typeface="+mn-cs"/>
-            </a:endParaRPr>
-          </a:p>
-          <a:p>
-            <a:r>
-              <a:rPr lang="en-US" sz="1200" kern="1200" dirty="0">
-                <a:solidFill>
-                  <a:schemeClr val="tx1"/>
-                </a:solidFill>
-                <a:effectLst/>
-                <a:latin typeface="+mn-lt"/>
-                <a:ea typeface="+mn-ea"/>
-                <a:cs typeface="+mn-cs"/>
-              </a:rPr>
-              <a:t>\</a:t>
-            </a:r>
-            <a:r>
-              <a:rPr lang="en-US" sz="1200" kern="1200" dirty="0" err="1">
-                <a:solidFill>
-                  <a:schemeClr val="tx1"/>
-                </a:solidFill>
-                <a:effectLst/>
-                <a:latin typeface="+mn-lt"/>
-                <a:ea typeface="+mn-ea"/>
-                <a:cs typeface="+mn-cs"/>
-              </a:rPr>
-              <a:t>cov</a:t>
-            </a:r>
-            <a:r>
-              <a:rPr lang="en-US" sz="1200" kern="1200" dirty="0">
-                <a:solidFill>
-                  <a:schemeClr val="tx1"/>
-                </a:solidFill>
-                <a:effectLst/>
-                <a:latin typeface="+mn-lt"/>
-                <a:ea typeface="+mn-ea"/>
-                <a:cs typeface="+mn-cs"/>
-              </a:rPr>
-              <a:t>[\</a:t>
-            </a:r>
-            <a:r>
-              <a:rPr lang="en-US" sz="1200" kern="1200" dirty="0" err="1">
-                <a:solidFill>
-                  <a:schemeClr val="tx1"/>
-                </a:solidFill>
-                <a:effectLst/>
-                <a:latin typeface="+mn-lt"/>
-                <a:ea typeface="+mn-ea"/>
-                <a:cs typeface="+mn-cs"/>
-              </a:rPr>
-              <a:t>widehat</a:t>
-            </a:r>
-            <a:r>
-              <a:rPr lang="en-US" sz="1200" kern="1200" dirty="0">
-                <a:solidFill>
-                  <a:schemeClr val="tx1"/>
-                </a:solidFill>
-                <a:effectLst/>
-                <a:latin typeface="+mn-lt"/>
-                <a:ea typeface="+mn-ea"/>
-                <a:cs typeface="+mn-cs"/>
-              </a:rPr>
-              <a:t>\</a:t>
-            </a:r>
-            <a:r>
-              <a:rPr lang="en-US" sz="1200" kern="1200" dirty="0" err="1">
-                <a:solidFill>
-                  <a:schemeClr val="tx1"/>
-                </a:solidFill>
-                <a:effectLst/>
-                <a:latin typeface="+mn-lt"/>
-                <a:ea typeface="+mn-ea"/>
-                <a:cs typeface="+mn-cs"/>
-              </a:rPr>
-              <a:t>btheta</a:t>
-            </a:r>
-            <a:r>
-              <a:rPr lang="en-US" sz="1200" kern="1200" dirty="0">
-                <a:solidFill>
-                  <a:schemeClr val="tx1"/>
-                </a:solidFill>
-                <a:effectLst/>
-                <a:latin typeface="+mn-lt"/>
-                <a:ea typeface="+mn-ea"/>
-                <a:cs typeface="+mn-cs"/>
-              </a:rPr>
-              <a:t>] &amp;= \</a:t>
-            </a:r>
-            <a:r>
-              <a:rPr lang="en-US" sz="1200" kern="1200" dirty="0" err="1">
-                <a:solidFill>
-                  <a:schemeClr val="tx1"/>
-                </a:solidFill>
-                <a:effectLst/>
-                <a:latin typeface="+mn-lt"/>
-                <a:ea typeface="+mn-ea"/>
-                <a:cs typeface="+mn-cs"/>
-              </a:rPr>
-              <a:t>cov</a:t>
-            </a:r>
-            <a:r>
-              <a:rPr lang="en-US" sz="1200" kern="1200" dirty="0">
-                <a:solidFill>
-                  <a:schemeClr val="tx1"/>
-                </a:solidFill>
-                <a:effectLst/>
-                <a:latin typeface="+mn-lt"/>
-                <a:ea typeface="+mn-ea"/>
-                <a:cs typeface="+mn-cs"/>
-              </a:rPr>
-              <a:t>[\</a:t>
-            </a:r>
-            <a:r>
-              <a:rPr lang="en-US" sz="1200" kern="1200" dirty="0" err="1">
-                <a:solidFill>
-                  <a:schemeClr val="tx1"/>
-                </a:solidFill>
-                <a:effectLst/>
-                <a:latin typeface="+mn-lt"/>
-                <a:ea typeface="+mn-ea"/>
-                <a:cs typeface="+mn-cs"/>
-              </a:rPr>
-              <a:t>btheta</a:t>
-            </a:r>
-            <a:r>
-              <a:rPr lang="en-US" sz="1200" kern="1200" dirty="0">
-                <a:solidFill>
-                  <a:schemeClr val="tx1"/>
-                </a:solidFill>
-                <a:effectLst/>
-                <a:latin typeface="+mn-lt"/>
-                <a:ea typeface="+mn-ea"/>
-                <a:cs typeface="+mn-cs"/>
-              </a:rPr>
-              <a:t> + (Z^T Z)^{-1}Z^T\</a:t>
-            </a:r>
-            <a:r>
-              <a:rPr lang="en-US" sz="1200" kern="1200" dirty="0" err="1">
-                <a:solidFill>
-                  <a:schemeClr val="tx1"/>
-                </a:solidFill>
-                <a:effectLst/>
-                <a:latin typeface="+mn-lt"/>
-                <a:ea typeface="+mn-ea"/>
-                <a:cs typeface="+mn-cs"/>
-              </a:rPr>
-              <a:t>beps</a:t>
-            </a:r>
-            <a:r>
-              <a:rPr lang="en-US" sz="1200" kern="1200" dirty="0">
-                <a:solidFill>
-                  <a:schemeClr val="tx1"/>
-                </a:solidFill>
-                <a:effectLst/>
-                <a:latin typeface="+mn-lt"/>
-                <a:ea typeface="+mn-ea"/>
-                <a:cs typeface="+mn-cs"/>
-              </a:rPr>
-              <a:t>]\\</a:t>
-            </a:r>
-          </a:p>
-          <a:p>
-            <a:r>
-              <a:rPr lang="en-US" sz="1200" kern="1200" dirty="0">
-                <a:solidFill>
-                  <a:schemeClr val="tx1"/>
-                </a:solidFill>
-                <a:effectLst/>
-                <a:latin typeface="+mn-lt"/>
-                <a:ea typeface="+mn-ea"/>
-                <a:cs typeface="+mn-cs"/>
-              </a:rPr>
-              <a:t>                      &amp;= (Z^T Z)^{-1}Z^T\</a:t>
-            </a:r>
-            <a:r>
-              <a:rPr lang="en-US" sz="1200" kern="1200" dirty="0" err="1">
-                <a:solidFill>
-                  <a:schemeClr val="tx1"/>
-                </a:solidFill>
-                <a:effectLst/>
-                <a:latin typeface="+mn-lt"/>
-                <a:ea typeface="+mn-ea"/>
-                <a:cs typeface="+mn-cs"/>
-              </a:rPr>
-              <a:t>cov</a:t>
-            </a:r>
-            <a:r>
-              <a:rPr lang="en-US" sz="1200" kern="1200" dirty="0">
-                <a:solidFill>
-                  <a:schemeClr val="tx1"/>
-                </a:solidFill>
-                <a:effectLst/>
-                <a:latin typeface="+mn-lt"/>
-                <a:ea typeface="+mn-ea"/>
-                <a:cs typeface="+mn-cs"/>
-              </a:rPr>
-              <a:t>[\</a:t>
-            </a:r>
-            <a:r>
-              <a:rPr lang="en-US" sz="1200" kern="1200" dirty="0" err="1">
-                <a:solidFill>
-                  <a:schemeClr val="tx1"/>
-                </a:solidFill>
-                <a:effectLst/>
-                <a:latin typeface="+mn-lt"/>
-                <a:ea typeface="+mn-ea"/>
-                <a:cs typeface="+mn-cs"/>
-              </a:rPr>
-              <a:t>beps</a:t>
-            </a:r>
-            <a:r>
-              <a:rPr lang="en-US" sz="1200" kern="1200" dirty="0">
-                <a:solidFill>
-                  <a:schemeClr val="tx1"/>
-                </a:solidFill>
-                <a:effectLst/>
-                <a:latin typeface="+mn-lt"/>
-                <a:ea typeface="+mn-ea"/>
-                <a:cs typeface="+mn-cs"/>
-              </a:rPr>
-              <a:t>]Z(Z^T Z)^{-1}\\</a:t>
-            </a:r>
-          </a:p>
-          <a:p>
-            <a:r>
-              <a:rPr lang="en-US" sz="1200" kern="1200" dirty="0">
-                <a:solidFill>
-                  <a:schemeClr val="tx1"/>
-                </a:solidFill>
-                <a:effectLst/>
-                <a:latin typeface="+mn-lt"/>
-                <a:ea typeface="+mn-ea"/>
-                <a:cs typeface="+mn-cs"/>
-              </a:rPr>
-              <a:t>                      &amp;= \sigma^2 (Z^T Z)^{-1}\\</a:t>
-            </a:r>
-          </a:p>
-          <a:p>
-            <a:r>
-              <a:rPr lang="en-US" sz="1200" kern="1200" dirty="0">
-                <a:solidFill>
-                  <a:schemeClr val="tx1"/>
-                </a:solidFill>
-                <a:effectLst/>
-                <a:latin typeface="+mn-lt"/>
-                <a:ea typeface="+mn-ea"/>
-                <a:cs typeface="+mn-cs"/>
-              </a:rPr>
-              <a:t>                      &amp;= \sigma^2 \left(\sum_{</a:t>
-            </a:r>
-            <a:r>
-              <a:rPr lang="en-US" sz="1200" kern="1200" dirty="0" err="1">
-                <a:solidFill>
-                  <a:schemeClr val="tx1"/>
-                </a:solidFill>
-                <a:effectLst/>
-                <a:latin typeface="+mn-lt"/>
-                <a:ea typeface="+mn-ea"/>
-                <a:cs typeface="+mn-cs"/>
-              </a:rPr>
-              <a:t>i</a:t>
-            </a:r>
-            <a:r>
-              <a:rPr lang="en-US" sz="1200" kern="1200" dirty="0">
-                <a:solidFill>
-                  <a:schemeClr val="tx1"/>
-                </a:solidFill>
-                <a:effectLst/>
-                <a:latin typeface="+mn-lt"/>
-                <a:ea typeface="+mn-ea"/>
-                <a:cs typeface="+mn-cs"/>
-              </a:rPr>
-              <a:t>=1}^N \</a:t>
-            </a:r>
-            <a:r>
-              <a:rPr lang="en-US" sz="1200" kern="1200" dirty="0" err="1">
-                <a:solidFill>
-                  <a:schemeClr val="tx1"/>
-                </a:solidFill>
-                <a:effectLst/>
-                <a:latin typeface="+mn-lt"/>
-                <a:ea typeface="+mn-ea"/>
-                <a:cs typeface="+mn-cs"/>
-              </a:rPr>
-              <a:t>z_i</a:t>
-            </a:r>
-            <a:r>
-              <a:rPr lang="en-US" sz="1200" kern="1200" dirty="0">
-                <a:solidFill>
-                  <a:schemeClr val="tx1"/>
-                </a:solidFill>
-                <a:effectLst/>
-                <a:latin typeface="+mn-lt"/>
-                <a:ea typeface="+mn-ea"/>
-                <a:cs typeface="+mn-cs"/>
-              </a:rPr>
-              <a:t> \</a:t>
-            </a:r>
-            <a:r>
-              <a:rPr lang="en-US" sz="1200" kern="1200" dirty="0" err="1">
-                <a:solidFill>
-                  <a:schemeClr val="tx1"/>
-                </a:solidFill>
-                <a:effectLst/>
-                <a:latin typeface="+mn-lt"/>
-                <a:ea typeface="+mn-ea"/>
-                <a:cs typeface="+mn-cs"/>
-              </a:rPr>
-              <a:t>z_i^T</a:t>
-            </a:r>
-            <a:r>
-              <a:rPr lang="en-US" sz="1200" kern="1200" dirty="0">
-                <a:solidFill>
-                  <a:schemeClr val="tx1"/>
-                </a:solidFill>
-                <a:effectLst/>
-                <a:latin typeface="+mn-lt"/>
-                <a:ea typeface="+mn-ea"/>
-                <a:cs typeface="+mn-cs"/>
-              </a:rPr>
-              <a:t>\right)^{-1} = \sigma^2 \left(\sum_{</a:t>
-            </a:r>
-            <a:r>
-              <a:rPr lang="en-US" sz="1200" kern="1200" dirty="0" err="1">
-                <a:solidFill>
-                  <a:schemeClr val="tx1"/>
-                </a:solidFill>
-                <a:effectLst/>
-                <a:latin typeface="+mn-lt"/>
-                <a:ea typeface="+mn-ea"/>
-                <a:cs typeface="+mn-cs"/>
-              </a:rPr>
-              <a:t>i</a:t>
-            </a:r>
-            <a:r>
-              <a:rPr lang="en-US" sz="1200" kern="1200" dirty="0">
-                <a:solidFill>
-                  <a:schemeClr val="tx1"/>
-                </a:solidFill>
-                <a:effectLst/>
-                <a:latin typeface="+mn-lt"/>
-                <a:ea typeface="+mn-ea"/>
-                <a:cs typeface="+mn-cs"/>
-              </a:rPr>
-              <a:t>=1}^N \begin{</a:t>
-            </a:r>
-            <a:r>
-              <a:rPr lang="en-US" sz="1200" kern="1200" dirty="0" err="1">
-                <a:solidFill>
-                  <a:schemeClr val="tx1"/>
-                </a:solidFill>
-                <a:effectLst/>
-                <a:latin typeface="+mn-lt"/>
-                <a:ea typeface="+mn-ea"/>
-                <a:cs typeface="+mn-cs"/>
-              </a:rPr>
-              <a:t>bmatrix</a:t>
-            </a:r>
-            <a:r>
-              <a:rPr lang="en-US" sz="1200" kern="1200" dirty="0">
-                <a:solidFill>
-                  <a:schemeClr val="tx1"/>
-                </a:solidFill>
-                <a:effectLst/>
-                <a:latin typeface="+mn-lt"/>
-                <a:ea typeface="+mn-ea"/>
-                <a:cs typeface="+mn-cs"/>
-              </a:rPr>
-              <a:t>}x_t^2 &amp; </a:t>
-            </a:r>
-            <a:r>
-              <a:rPr lang="en-US" sz="1200" kern="1200" dirty="0" err="1">
-                <a:solidFill>
-                  <a:schemeClr val="tx1"/>
-                </a:solidFill>
-                <a:effectLst/>
-                <a:latin typeface="+mn-lt"/>
-                <a:ea typeface="+mn-ea"/>
-                <a:cs typeface="+mn-cs"/>
-              </a:rPr>
-              <a:t>x_t</a:t>
-            </a:r>
-            <a:r>
-              <a:rPr lang="en-US" sz="1200" kern="1200" dirty="0">
-                <a:solidFill>
-                  <a:schemeClr val="tx1"/>
-                </a:solidFill>
-                <a:effectLst/>
-                <a:latin typeface="+mn-lt"/>
-                <a:ea typeface="+mn-ea"/>
-                <a:cs typeface="+mn-cs"/>
-              </a:rPr>
-              <a:t> </a:t>
-            </a:r>
-            <a:r>
-              <a:rPr lang="en-US" sz="1200" kern="1200" dirty="0" err="1">
-                <a:solidFill>
-                  <a:schemeClr val="tx1"/>
-                </a:solidFill>
-                <a:effectLst/>
-                <a:latin typeface="+mn-lt"/>
-                <a:ea typeface="+mn-ea"/>
-                <a:cs typeface="+mn-cs"/>
-              </a:rPr>
-              <a:t>u_t</a:t>
-            </a:r>
-            <a:r>
-              <a:rPr lang="en-US" sz="1200" kern="1200" dirty="0">
-                <a:solidFill>
-                  <a:schemeClr val="tx1"/>
-                </a:solidFill>
-                <a:effectLst/>
-                <a:latin typeface="+mn-lt"/>
-                <a:ea typeface="+mn-ea"/>
-                <a:cs typeface="+mn-cs"/>
-              </a:rPr>
-              <a:t> \\ </a:t>
-            </a:r>
-            <a:r>
-              <a:rPr lang="en-US" sz="1200" kern="1200" dirty="0" err="1">
-                <a:solidFill>
-                  <a:schemeClr val="tx1"/>
-                </a:solidFill>
-                <a:effectLst/>
-                <a:latin typeface="+mn-lt"/>
-                <a:ea typeface="+mn-ea"/>
-                <a:cs typeface="+mn-cs"/>
-              </a:rPr>
-              <a:t>x_t</a:t>
-            </a:r>
-            <a:r>
-              <a:rPr lang="en-US" sz="1200" kern="1200" dirty="0">
-                <a:solidFill>
-                  <a:schemeClr val="tx1"/>
-                </a:solidFill>
-                <a:effectLst/>
-                <a:latin typeface="+mn-lt"/>
-                <a:ea typeface="+mn-ea"/>
-                <a:cs typeface="+mn-cs"/>
-              </a:rPr>
-              <a:t> </a:t>
-            </a:r>
-            <a:r>
-              <a:rPr lang="en-US" sz="1200" kern="1200" dirty="0" err="1">
-                <a:solidFill>
-                  <a:schemeClr val="tx1"/>
-                </a:solidFill>
-                <a:effectLst/>
-                <a:latin typeface="+mn-lt"/>
-                <a:ea typeface="+mn-ea"/>
-                <a:cs typeface="+mn-cs"/>
-              </a:rPr>
-              <a:t>u_t</a:t>
-            </a:r>
-            <a:r>
-              <a:rPr lang="en-US" sz="1200" kern="1200" dirty="0">
-                <a:solidFill>
-                  <a:schemeClr val="tx1"/>
-                </a:solidFill>
-                <a:effectLst/>
-                <a:latin typeface="+mn-lt"/>
-                <a:ea typeface="+mn-ea"/>
-                <a:cs typeface="+mn-cs"/>
-              </a:rPr>
-              <a:t> &amp; u_t^2\end{</a:t>
-            </a:r>
-            <a:r>
-              <a:rPr lang="en-US" sz="1200" kern="1200" dirty="0" err="1">
-                <a:solidFill>
-                  <a:schemeClr val="tx1"/>
-                </a:solidFill>
-                <a:effectLst/>
-                <a:latin typeface="+mn-lt"/>
-                <a:ea typeface="+mn-ea"/>
-                <a:cs typeface="+mn-cs"/>
-              </a:rPr>
-              <a:t>bmatrix</a:t>
-            </a:r>
-            <a:r>
-              <a:rPr lang="en-US" sz="1200" kern="1200" dirty="0">
-                <a:solidFill>
-                  <a:schemeClr val="tx1"/>
-                </a:solidFill>
-                <a:effectLst/>
-                <a:latin typeface="+mn-lt"/>
-                <a:ea typeface="+mn-ea"/>
-                <a:cs typeface="+mn-cs"/>
-              </a:rPr>
-              <a:t>}\right)^{-1}</a:t>
-            </a:r>
-          </a:p>
-          <a:p>
             <a:endParaRPr lang="en-US" sz="1200" kern="1200" dirty="0">
               <a:solidFill>
                 <a:schemeClr val="tx1"/>
@@ -3514,939 +1607,6 @@
           <a:bodyPr/>
           <a:lstStyle/>
           <a:p>
-            <a:r>
-              <a:rPr lang="en-US" sz="1200" kern="1200" dirty="0">
-                <a:solidFill>
-                  <a:schemeClr val="tx1"/>
-                </a:solidFill>
-                <a:effectLst/>
-                <a:latin typeface="+mn-lt"/>
-                <a:ea typeface="+mn-ea"/>
-                <a:cs typeface="+mn-cs"/>
-              </a:rPr>
-              <a:t>\</a:t>
-            </a:r>
-            <a:r>
-              <a:rPr lang="en-US" sz="1200" kern="1200" dirty="0" err="1">
-                <a:solidFill>
-                  <a:schemeClr val="tx1"/>
-                </a:solidFill>
-                <a:effectLst/>
-                <a:latin typeface="+mn-lt"/>
-                <a:ea typeface="+mn-ea"/>
-                <a:cs typeface="+mn-cs"/>
-              </a:rPr>
-              <a:t>widehat</a:t>
-            </a:r>
-            <a:r>
-              <a:rPr lang="en-US" sz="1200" kern="1200" dirty="0">
-                <a:solidFill>
-                  <a:schemeClr val="tx1"/>
-                </a:solidFill>
-                <a:effectLst/>
-                <a:latin typeface="+mn-lt"/>
-                <a:ea typeface="+mn-ea"/>
-                <a:cs typeface="+mn-cs"/>
-              </a:rPr>
-              <a:t>\</a:t>
-            </a:r>
-            <a:r>
-              <a:rPr lang="en-US" sz="1200" kern="1200" dirty="0" err="1">
-                <a:solidFill>
-                  <a:schemeClr val="tx1"/>
-                </a:solidFill>
-                <a:effectLst/>
-                <a:latin typeface="+mn-lt"/>
-                <a:ea typeface="+mn-ea"/>
-                <a:cs typeface="+mn-cs"/>
-              </a:rPr>
-              <a:t>btheta</a:t>
-            </a:r>
-            <a:r>
-              <a:rPr lang="en-US" sz="1200" kern="1200" dirty="0">
-                <a:solidFill>
-                  <a:schemeClr val="tx1"/>
-                </a:solidFill>
-                <a:effectLst/>
-                <a:latin typeface="+mn-lt"/>
-                <a:ea typeface="+mn-ea"/>
-                <a:cs typeface="+mn-cs"/>
-              </a:rPr>
-              <a:t> &amp;= (Z^T Z)^{-1}Z^T\y\\</a:t>
-            </a:r>
-          </a:p>
-          <a:p>
-            <a:r>
-              <a:rPr lang="en-US" sz="1200" kern="1200" dirty="0">
-                <a:solidFill>
-                  <a:schemeClr val="tx1"/>
-                </a:solidFill>
-                <a:effectLst/>
-                <a:latin typeface="+mn-lt"/>
-                <a:ea typeface="+mn-ea"/>
-                <a:cs typeface="+mn-cs"/>
-              </a:rPr>
-              <a:t>                &amp;= (Z^T Z)^{-1}Z^T(Z\</a:t>
-            </a:r>
-            <a:r>
-              <a:rPr lang="en-US" sz="1200" kern="1200" dirty="0" err="1">
-                <a:solidFill>
-                  <a:schemeClr val="tx1"/>
-                </a:solidFill>
-                <a:effectLst/>
-                <a:latin typeface="+mn-lt"/>
-                <a:ea typeface="+mn-ea"/>
-                <a:cs typeface="+mn-cs"/>
-              </a:rPr>
-              <a:t>btheta</a:t>
-            </a:r>
-            <a:r>
-              <a:rPr lang="en-US" sz="1200" kern="1200" dirty="0">
-                <a:solidFill>
-                  <a:schemeClr val="tx1"/>
-                </a:solidFill>
-                <a:effectLst/>
-                <a:latin typeface="+mn-lt"/>
-                <a:ea typeface="+mn-ea"/>
-                <a:cs typeface="+mn-cs"/>
-              </a:rPr>
-              <a:t> + \</a:t>
-            </a:r>
-            <a:r>
-              <a:rPr lang="en-US" sz="1200" kern="1200" dirty="0" err="1">
-                <a:solidFill>
-                  <a:schemeClr val="tx1"/>
-                </a:solidFill>
-                <a:effectLst/>
-                <a:latin typeface="+mn-lt"/>
-                <a:ea typeface="+mn-ea"/>
-                <a:cs typeface="+mn-cs"/>
-              </a:rPr>
-              <a:t>beps</a:t>
-            </a:r>
-            <a:r>
-              <a:rPr lang="en-US" sz="1200" kern="1200" dirty="0">
-                <a:solidFill>
-                  <a:schemeClr val="tx1"/>
-                </a:solidFill>
-                <a:effectLst/>
-                <a:latin typeface="+mn-lt"/>
-                <a:ea typeface="+mn-ea"/>
-                <a:cs typeface="+mn-cs"/>
-              </a:rPr>
-              <a:t>)\\</a:t>
-            </a:r>
-          </a:p>
-          <a:p>
-            <a:r>
-              <a:rPr lang="en-US" sz="1200" kern="1200" dirty="0">
-                <a:solidFill>
-                  <a:schemeClr val="tx1"/>
-                </a:solidFill>
-                <a:effectLst/>
-                <a:latin typeface="+mn-lt"/>
-                <a:ea typeface="+mn-ea"/>
-                <a:cs typeface="+mn-cs"/>
-              </a:rPr>
-              <a:t>                &amp;= \</a:t>
-            </a:r>
-            <a:r>
-              <a:rPr lang="en-US" sz="1200" kern="1200" dirty="0" err="1">
-                <a:solidFill>
-                  <a:schemeClr val="tx1"/>
-                </a:solidFill>
-                <a:effectLst/>
-                <a:latin typeface="+mn-lt"/>
-                <a:ea typeface="+mn-ea"/>
-                <a:cs typeface="+mn-cs"/>
-              </a:rPr>
-              <a:t>btheta</a:t>
-            </a:r>
-            <a:r>
-              <a:rPr lang="en-US" sz="1200" kern="1200" dirty="0">
-                <a:solidFill>
-                  <a:schemeClr val="tx1"/>
-                </a:solidFill>
-                <a:effectLst/>
-                <a:latin typeface="+mn-lt"/>
-                <a:ea typeface="+mn-ea"/>
-                <a:cs typeface="+mn-cs"/>
-              </a:rPr>
-              <a:t> + (Z^T Z)^{-1}Z^T\</a:t>
-            </a:r>
-            <a:r>
-              <a:rPr lang="en-US" sz="1200" kern="1200" dirty="0" err="1">
-                <a:solidFill>
-                  <a:schemeClr val="tx1"/>
-                </a:solidFill>
-                <a:effectLst/>
-                <a:latin typeface="+mn-lt"/>
-                <a:ea typeface="+mn-ea"/>
-                <a:cs typeface="+mn-cs"/>
-              </a:rPr>
-              <a:t>beps</a:t>
-            </a:r>
-            <a:endParaRPr lang="en-US" sz="1200" kern="1200" dirty="0">
-              <a:solidFill>
-                <a:schemeClr val="tx1"/>
-              </a:solidFill>
-              <a:effectLst/>
-              <a:latin typeface="+mn-lt"/>
-              <a:ea typeface="+mn-ea"/>
-              <a:cs typeface="+mn-cs"/>
-            </a:endParaRPr>
-          </a:p>
-          <a:p>
-            <a:endParaRPr lang="en-US" sz="1200" kern="1200" dirty="0">
-              <a:solidFill>
-                <a:schemeClr val="tx1"/>
-              </a:solidFill>
-              <a:effectLst/>
-              <a:latin typeface="+mn-lt"/>
-              <a:ea typeface="+mn-ea"/>
-              <a:cs typeface="+mn-cs"/>
-            </a:endParaRPr>
-          </a:p>
-          <a:p>
-            <a:endParaRPr lang="en-US" sz="1200" kern="1200" dirty="0">
-              <a:solidFill>
-                <a:schemeClr val="tx1"/>
-              </a:solidFill>
-              <a:effectLst/>
-              <a:latin typeface="+mn-lt"/>
-              <a:ea typeface="+mn-ea"/>
-              <a:cs typeface="+mn-cs"/>
-            </a:endParaRPr>
-          </a:p>
-          <a:p>
-            <a:endParaRPr lang="en-US" sz="1200" kern="1200" dirty="0">
-              <a:solidFill>
-                <a:schemeClr val="tx1"/>
-              </a:solidFill>
-              <a:effectLst/>
-              <a:latin typeface="+mn-lt"/>
-              <a:ea typeface="+mn-ea"/>
-              <a:cs typeface="+mn-cs"/>
-            </a:endParaRPr>
-          </a:p>
-          <a:p>
-            <a:r>
-              <a:rPr lang="en-US" sz="1200" kern="1200" dirty="0">
-                <a:solidFill>
-                  <a:schemeClr val="tx1"/>
-                </a:solidFill>
-                <a:effectLst/>
-                <a:latin typeface="+mn-lt"/>
-                <a:ea typeface="+mn-ea"/>
-                <a:cs typeface="+mn-cs"/>
-              </a:rPr>
-              <a:t>\E[\</a:t>
-            </a:r>
-            <a:r>
-              <a:rPr lang="en-US" sz="1200" kern="1200" dirty="0" err="1">
-                <a:solidFill>
-                  <a:schemeClr val="tx1"/>
-                </a:solidFill>
-                <a:effectLst/>
-                <a:latin typeface="+mn-lt"/>
-                <a:ea typeface="+mn-ea"/>
-                <a:cs typeface="+mn-cs"/>
-              </a:rPr>
-              <a:t>widehat</a:t>
-            </a:r>
-            <a:r>
-              <a:rPr lang="en-US" sz="1200" kern="1200" dirty="0">
-                <a:solidFill>
-                  <a:schemeClr val="tx1"/>
-                </a:solidFill>
-                <a:effectLst/>
-                <a:latin typeface="+mn-lt"/>
-                <a:ea typeface="+mn-ea"/>
-                <a:cs typeface="+mn-cs"/>
-              </a:rPr>
-              <a:t>\</a:t>
-            </a:r>
-            <a:r>
-              <a:rPr lang="en-US" sz="1200" kern="1200" dirty="0" err="1">
-                <a:solidFill>
-                  <a:schemeClr val="tx1"/>
-                </a:solidFill>
-                <a:effectLst/>
-                <a:latin typeface="+mn-lt"/>
-                <a:ea typeface="+mn-ea"/>
-                <a:cs typeface="+mn-cs"/>
-              </a:rPr>
-              <a:t>btheta</a:t>
-            </a:r>
-            <a:r>
-              <a:rPr lang="en-US" sz="1200" kern="1200" dirty="0">
-                <a:solidFill>
-                  <a:schemeClr val="tx1"/>
-                </a:solidFill>
-                <a:effectLst/>
-                <a:latin typeface="+mn-lt"/>
-                <a:ea typeface="+mn-ea"/>
-                <a:cs typeface="+mn-cs"/>
-              </a:rPr>
-              <a:t>] &amp;= \E[\</a:t>
-            </a:r>
-            <a:r>
-              <a:rPr lang="en-US" sz="1200" kern="1200" dirty="0" err="1">
-                <a:solidFill>
-                  <a:schemeClr val="tx1"/>
-                </a:solidFill>
-                <a:effectLst/>
-                <a:latin typeface="+mn-lt"/>
-                <a:ea typeface="+mn-ea"/>
-                <a:cs typeface="+mn-cs"/>
-              </a:rPr>
-              <a:t>btheta</a:t>
-            </a:r>
-            <a:r>
-              <a:rPr lang="en-US" sz="1200" kern="1200" dirty="0">
-                <a:solidFill>
-                  <a:schemeClr val="tx1"/>
-                </a:solidFill>
-                <a:effectLst/>
-                <a:latin typeface="+mn-lt"/>
-                <a:ea typeface="+mn-ea"/>
-                <a:cs typeface="+mn-cs"/>
-              </a:rPr>
-              <a:t> + (Z^T Z)^{-1}Z^T\</a:t>
-            </a:r>
-            <a:r>
-              <a:rPr lang="en-US" sz="1200" kern="1200" dirty="0" err="1">
-                <a:solidFill>
-                  <a:schemeClr val="tx1"/>
-                </a:solidFill>
-                <a:effectLst/>
-                <a:latin typeface="+mn-lt"/>
-                <a:ea typeface="+mn-ea"/>
-                <a:cs typeface="+mn-cs"/>
-              </a:rPr>
-              <a:t>beps</a:t>
-            </a:r>
-            <a:r>
-              <a:rPr lang="en-US" sz="1200" kern="1200" dirty="0">
-                <a:solidFill>
-                  <a:schemeClr val="tx1"/>
-                </a:solidFill>
-                <a:effectLst/>
-                <a:latin typeface="+mn-lt"/>
-                <a:ea typeface="+mn-ea"/>
-                <a:cs typeface="+mn-cs"/>
-              </a:rPr>
-              <a:t>]\\</a:t>
-            </a:r>
-          </a:p>
-          <a:p>
-            <a:r>
-              <a:rPr lang="en-US" sz="1200" kern="1200" dirty="0">
-                <a:solidFill>
-                  <a:schemeClr val="tx1"/>
-                </a:solidFill>
-                <a:effectLst/>
-                <a:latin typeface="+mn-lt"/>
-                <a:ea typeface="+mn-ea"/>
-                <a:cs typeface="+mn-cs"/>
-              </a:rPr>
-              <a:t>                    &amp;= \</a:t>
-            </a:r>
-            <a:r>
-              <a:rPr lang="en-US" sz="1200" kern="1200" dirty="0" err="1">
-                <a:solidFill>
-                  <a:schemeClr val="tx1"/>
-                </a:solidFill>
-                <a:effectLst/>
-                <a:latin typeface="+mn-lt"/>
-                <a:ea typeface="+mn-ea"/>
-                <a:cs typeface="+mn-cs"/>
-              </a:rPr>
-              <a:t>btheta</a:t>
-            </a:r>
-            <a:r>
-              <a:rPr lang="en-US" sz="1200" kern="1200" dirty="0">
-                <a:solidFill>
-                  <a:schemeClr val="tx1"/>
-                </a:solidFill>
-                <a:effectLst/>
-                <a:latin typeface="+mn-lt"/>
-                <a:ea typeface="+mn-ea"/>
-                <a:cs typeface="+mn-cs"/>
-              </a:rPr>
-              <a:t> + (Z^T Z)^{-1}Z^T\E[\</a:t>
-            </a:r>
-            <a:r>
-              <a:rPr lang="en-US" sz="1200" kern="1200" dirty="0" err="1">
-                <a:solidFill>
-                  <a:schemeClr val="tx1"/>
-                </a:solidFill>
-                <a:effectLst/>
-                <a:latin typeface="+mn-lt"/>
-                <a:ea typeface="+mn-ea"/>
-                <a:cs typeface="+mn-cs"/>
-              </a:rPr>
-              <a:t>beps</a:t>
-            </a:r>
-            <a:r>
-              <a:rPr lang="en-US" sz="1200" kern="1200" dirty="0">
-                <a:solidFill>
-                  <a:schemeClr val="tx1"/>
-                </a:solidFill>
-                <a:effectLst/>
-                <a:latin typeface="+mn-lt"/>
-                <a:ea typeface="+mn-ea"/>
-                <a:cs typeface="+mn-cs"/>
-              </a:rPr>
-              <a:t>]\\</a:t>
-            </a:r>
-          </a:p>
-          <a:p>
-            <a:r>
-              <a:rPr lang="en-US" sz="1200" kern="1200" dirty="0">
-                <a:solidFill>
-                  <a:schemeClr val="tx1"/>
-                </a:solidFill>
-                <a:effectLst/>
-                <a:latin typeface="+mn-lt"/>
-                <a:ea typeface="+mn-ea"/>
-                <a:cs typeface="+mn-cs"/>
-              </a:rPr>
-              <a:t>                    &amp;= \</a:t>
-            </a:r>
-            <a:r>
-              <a:rPr lang="en-US" sz="1200" kern="1200" dirty="0" err="1">
-                <a:solidFill>
-                  <a:schemeClr val="tx1"/>
-                </a:solidFill>
-                <a:effectLst/>
-                <a:latin typeface="+mn-lt"/>
-                <a:ea typeface="+mn-ea"/>
-                <a:cs typeface="+mn-cs"/>
-              </a:rPr>
-              <a:t>btheta</a:t>
-            </a:r>
-            <a:endParaRPr lang="en-US" sz="1200" kern="1200" dirty="0">
-              <a:solidFill>
-                <a:schemeClr val="tx1"/>
-              </a:solidFill>
-              <a:effectLst/>
-              <a:latin typeface="+mn-lt"/>
-              <a:ea typeface="+mn-ea"/>
-              <a:cs typeface="+mn-cs"/>
-            </a:endParaRPr>
-          </a:p>
-          <a:p>
-            <a:endParaRPr lang="en-US" sz="1200" kern="1200" dirty="0">
-              <a:solidFill>
-                <a:schemeClr val="tx1"/>
-              </a:solidFill>
-              <a:effectLst/>
-              <a:latin typeface="+mn-lt"/>
-              <a:ea typeface="+mn-ea"/>
-              <a:cs typeface="+mn-cs"/>
-            </a:endParaRPr>
-          </a:p>
-          <a:p>
-            <a:endParaRPr lang="en-US" sz="1200" kern="1200" dirty="0">
-              <a:solidFill>
-                <a:schemeClr val="tx1"/>
-              </a:solidFill>
-              <a:effectLst/>
-              <a:latin typeface="+mn-lt"/>
-              <a:ea typeface="+mn-ea"/>
-              <a:cs typeface="+mn-cs"/>
-            </a:endParaRPr>
-          </a:p>
-          <a:p>
-            <a:r>
-              <a:rPr lang="en-US" sz="1200" kern="1200" dirty="0">
-                <a:solidFill>
-                  <a:schemeClr val="tx1"/>
-                </a:solidFill>
-                <a:effectLst/>
-                <a:latin typeface="+mn-lt"/>
-                <a:ea typeface="+mn-ea"/>
-                <a:cs typeface="+mn-cs"/>
-              </a:rPr>
-              <a:t>\</a:t>
-            </a:r>
-            <a:r>
-              <a:rPr lang="en-US" sz="1200" kern="1200" dirty="0" err="1">
-                <a:solidFill>
-                  <a:schemeClr val="tx1"/>
-                </a:solidFill>
-                <a:effectLst/>
-                <a:latin typeface="+mn-lt"/>
-                <a:ea typeface="+mn-ea"/>
-                <a:cs typeface="+mn-cs"/>
-              </a:rPr>
-              <a:t>cov</a:t>
-            </a:r>
-            <a:r>
-              <a:rPr lang="en-US" sz="1200" kern="1200" dirty="0">
-                <a:solidFill>
-                  <a:schemeClr val="tx1"/>
-                </a:solidFill>
-                <a:effectLst/>
-                <a:latin typeface="+mn-lt"/>
-                <a:ea typeface="+mn-ea"/>
-                <a:cs typeface="+mn-cs"/>
-              </a:rPr>
-              <a:t>[\</a:t>
-            </a:r>
-            <a:r>
-              <a:rPr lang="en-US" sz="1200" kern="1200" dirty="0" err="1">
-                <a:solidFill>
-                  <a:schemeClr val="tx1"/>
-                </a:solidFill>
-                <a:effectLst/>
-                <a:latin typeface="+mn-lt"/>
-                <a:ea typeface="+mn-ea"/>
-                <a:cs typeface="+mn-cs"/>
-              </a:rPr>
-              <a:t>widehat</a:t>
-            </a:r>
-            <a:r>
-              <a:rPr lang="en-US" sz="1200" kern="1200" dirty="0">
-                <a:solidFill>
-                  <a:schemeClr val="tx1"/>
-                </a:solidFill>
-                <a:effectLst/>
-                <a:latin typeface="+mn-lt"/>
-                <a:ea typeface="+mn-ea"/>
-                <a:cs typeface="+mn-cs"/>
-              </a:rPr>
-              <a:t>\</a:t>
-            </a:r>
-            <a:r>
-              <a:rPr lang="en-US" sz="1200" kern="1200" dirty="0" err="1">
-                <a:solidFill>
-                  <a:schemeClr val="tx1"/>
-                </a:solidFill>
-                <a:effectLst/>
-                <a:latin typeface="+mn-lt"/>
-                <a:ea typeface="+mn-ea"/>
-                <a:cs typeface="+mn-cs"/>
-              </a:rPr>
-              <a:t>btheta</a:t>
-            </a:r>
-            <a:r>
-              <a:rPr lang="en-US" sz="1200" kern="1200" dirty="0">
-                <a:solidFill>
-                  <a:schemeClr val="tx1"/>
-                </a:solidFill>
-                <a:effectLst/>
-                <a:latin typeface="+mn-lt"/>
-                <a:ea typeface="+mn-ea"/>
-                <a:cs typeface="+mn-cs"/>
-              </a:rPr>
-              <a:t>] &amp;= \</a:t>
-            </a:r>
-            <a:r>
-              <a:rPr lang="en-US" sz="1200" kern="1200" dirty="0" err="1">
-                <a:solidFill>
-                  <a:schemeClr val="tx1"/>
-                </a:solidFill>
-                <a:effectLst/>
-                <a:latin typeface="+mn-lt"/>
-                <a:ea typeface="+mn-ea"/>
-                <a:cs typeface="+mn-cs"/>
-              </a:rPr>
-              <a:t>cov</a:t>
-            </a:r>
-            <a:r>
-              <a:rPr lang="en-US" sz="1200" kern="1200" dirty="0">
-                <a:solidFill>
-                  <a:schemeClr val="tx1"/>
-                </a:solidFill>
-                <a:effectLst/>
-                <a:latin typeface="+mn-lt"/>
-                <a:ea typeface="+mn-ea"/>
-                <a:cs typeface="+mn-cs"/>
-              </a:rPr>
-              <a:t>[\</a:t>
-            </a:r>
-            <a:r>
-              <a:rPr lang="en-US" sz="1200" kern="1200" dirty="0" err="1">
-                <a:solidFill>
-                  <a:schemeClr val="tx1"/>
-                </a:solidFill>
-                <a:effectLst/>
-                <a:latin typeface="+mn-lt"/>
-                <a:ea typeface="+mn-ea"/>
-                <a:cs typeface="+mn-cs"/>
-              </a:rPr>
-              <a:t>btheta</a:t>
-            </a:r>
-            <a:r>
-              <a:rPr lang="en-US" sz="1200" kern="1200" dirty="0">
-                <a:solidFill>
-                  <a:schemeClr val="tx1"/>
-                </a:solidFill>
-                <a:effectLst/>
-                <a:latin typeface="+mn-lt"/>
-                <a:ea typeface="+mn-ea"/>
-                <a:cs typeface="+mn-cs"/>
-              </a:rPr>
-              <a:t> + (Z^T Z)^{-1}Z^T\</a:t>
-            </a:r>
-            <a:r>
-              <a:rPr lang="en-US" sz="1200" kern="1200" dirty="0" err="1">
-                <a:solidFill>
-                  <a:schemeClr val="tx1"/>
-                </a:solidFill>
-                <a:effectLst/>
-                <a:latin typeface="+mn-lt"/>
-                <a:ea typeface="+mn-ea"/>
-                <a:cs typeface="+mn-cs"/>
-              </a:rPr>
-              <a:t>beps</a:t>
-            </a:r>
-            <a:r>
-              <a:rPr lang="en-US" sz="1200" kern="1200" dirty="0">
-                <a:solidFill>
-                  <a:schemeClr val="tx1"/>
-                </a:solidFill>
-                <a:effectLst/>
-                <a:latin typeface="+mn-lt"/>
-                <a:ea typeface="+mn-ea"/>
-                <a:cs typeface="+mn-cs"/>
-              </a:rPr>
-              <a:t>]\\</a:t>
-            </a:r>
-          </a:p>
-          <a:p>
-            <a:r>
-              <a:rPr lang="en-US" sz="1200" kern="1200" dirty="0">
-                <a:solidFill>
-                  <a:schemeClr val="tx1"/>
-                </a:solidFill>
-                <a:effectLst/>
-                <a:latin typeface="+mn-lt"/>
-                <a:ea typeface="+mn-ea"/>
-                <a:cs typeface="+mn-cs"/>
-              </a:rPr>
-              <a:t>                      &amp;= (Z^T Z)^{-1}Z^T\</a:t>
-            </a:r>
-            <a:r>
-              <a:rPr lang="en-US" sz="1200" kern="1200" dirty="0" err="1">
-                <a:solidFill>
-                  <a:schemeClr val="tx1"/>
-                </a:solidFill>
-                <a:effectLst/>
-                <a:latin typeface="+mn-lt"/>
-                <a:ea typeface="+mn-ea"/>
-                <a:cs typeface="+mn-cs"/>
-              </a:rPr>
-              <a:t>cov</a:t>
-            </a:r>
-            <a:r>
-              <a:rPr lang="en-US" sz="1200" kern="1200" dirty="0">
-                <a:solidFill>
-                  <a:schemeClr val="tx1"/>
-                </a:solidFill>
-                <a:effectLst/>
-                <a:latin typeface="+mn-lt"/>
-                <a:ea typeface="+mn-ea"/>
-                <a:cs typeface="+mn-cs"/>
-              </a:rPr>
-              <a:t>[\</a:t>
-            </a:r>
-            <a:r>
-              <a:rPr lang="en-US" sz="1200" kern="1200" dirty="0" err="1">
-                <a:solidFill>
-                  <a:schemeClr val="tx1"/>
-                </a:solidFill>
-                <a:effectLst/>
-                <a:latin typeface="+mn-lt"/>
-                <a:ea typeface="+mn-ea"/>
-                <a:cs typeface="+mn-cs"/>
-              </a:rPr>
-              <a:t>beps</a:t>
-            </a:r>
-            <a:r>
-              <a:rPr lang="en-US" sz="1200" kern="1200" dirty="0">
-                <a:solidFill>
-                  <a:schemeClr val="tx1"/>
-                </a:solidFill>
-                <a:effectLst/>
-                <a:latin typeface="+mn-lt"/>
-                <a:ea typeface="+mn-ea"/>
-                <a:cs typeface="+mn-cs"/>
-              </a:rPr>
-              <a:t>]Z(Z^T Z)^{-1}\\</a:t>
-            </a:r>
-          </a:p>
-          <a:p>
-            <a:r>
-              <a:rPr lang="en-US" sz="1200" kern="1200" dirty="0">
-                <a:solidFill>
-                  <a:schemeClr val="tx1"/>
-                </a:solidFill>
-                <a:effectLst/>
-                <a:latin typeface="+mn-lt"/>
-                <a:ea typeface="+mn-ea"/>
-                <a:cs typeface="+mn-cs"/>
-              </a:rPr>
-              <a:t>                      &amp;= \sigma^2 (Z^T Z)^{-1}\\</a:t>
-            </a:r>
-          </a:p>
-          <a:p>
-            <a:r>
-              <a:rPr lang="en-US" sz="1200" kern="1200" dirty="0">
-                <a:solidFill>
-                  <a:schemeClr val="tx1"/>
-                </a:solidFill>
-                <a:effectLst/>
-                <a:latin typeface="+mn-lt"/>
-                <a:ea typeface="+mn-ea"/>
-                <a:cs typeface="+mn-cs"/>
-              </a:rPr>
-              <a:t>                      &amp;= \sigma^2 \left(\sum_{</a:t>
-            </a:r>
-            <a:r>
-              <a:rPr lang="en-US" sz="1200" kern="1200" dirty="0" err="1">
-                <a:solidFill>
-                  <a:schemeClr val="tx1"/>
-                </a:solidFill>
-                <a:effectLst/>
-                <a:latin typeface="+mn-lt"/>
-                <a:ea typeface="+mn-ea"/>
-                <a:cs typeface="+mn-cs"/>
-              </a:rPr>
-              <a:t>i</a:t>
-            </a:r>
-            <a:r>
-              <a:rPr lang="en-US" sz="1200" kern="1200" dirty="0">
-                <a:solidFill>
-                  <a:schemeClr val="tx1"/>
-                </a:solidFill>
-                <a:effectLst/>
-                <a:latin typeface="+mn-lt"/>
-                <a:ea typeface="+mn-ea"/>
-                <a:cs typeface="+mn-cs"/>
-              </a:rPr>
-              <a:t>=1}^N \</a:t>
-            </a:r>
-            <a:r>
-              <a:rPr lang="en-US" sz="1200" kern="1200" dirty="0" err="1">
-                <a:solidFill>
-                  <a:schemeClr val="tx1"/>
-                </a:solidFill>
-                <a:effectLst/>
-                <a:latin typeface="+mn-lt"/>
-                <a:ea typeface="+mn-ea"/>
-                <a:cs typeface="+mn-cs"/>
-              </a:rPr>
-              <a:t>z_i</a:t>
-            </a:r>
-            <a:r>
-              <a:rPr lang="en-US" sz="1200" kern="1200" dirty="0">
-                <a:solidFill>
-                  <a:schemeClr val="tx1"/>
-                </a:solidFill>
-                <a:effectLst/>
-                <a:latin typeface="+mn-lt"/>
-                <a:ea typeface="+mn-ea"/>
-                <a:cs typeface="+mn-cs"/>
-              </a:rPr>
-              <a:t> \</a:t>
-            </a:r>
-            <a:r>
-              <a:rPr lang="en-US" sz="1200" kern="1200" dirty="0" err="1">
-                <a:solidFill>
-                  <a:schemeClr val="tx1"/>
-                </a:solidFill>
-                <a:effectLst/>
-                <a:latin typeface="+mn-lt"/>
-                <a:ea typeface="+mn-ea"/>
-                <a:cs typeface="+mn-cs"/>
-              </a:rPr>
-              <a:t>z_i^T</a:t>
-            </a:r>
-            <a:r>
-              <a:rPr lang="en-US" sz="1200" kern="1200" dirty="0">
-                <a:solidFill>
-                  <a:schemeClr val="tx1"/>
-                </a:solidFill>
-                <a:effectLst/>
-                <a:latin typeface="+mn-lt"/>
-                <a:ea typeface="+mn-ea"/>
-                <a:cs typeface="+mn-cs"/>
-              </a:rPr>
-              <a:t>\right)^{-1} = \sigma^2 \left(\sum_{</a:t>
-            </a:r>
-            <a:r>
-              <a:rPr lang="en-US" sz="1200" kern="1200" dirty="0" err="1">
-                <a:solidFill>
-                  <a:schemeClr val="tx1"/>
-                </a:solidFill>
-                <a:effectLst/>
-                <a:latin typeface="+mn-lt"/>
-                <a:ea typeface="+mn-ea"/>
-                <a:cs typeface="+mn-cs"/>
-              </a:rPr>
-              <a:t>i</a:t>
-            </a:r>
-            <a:r>
-              <a:rPr lang="en-US" sz="1200" kern="1200" dirty="0">
-                <a:solidFill>
-                  <a:schemeClr val="tx1"/>
-                </a:solidFill>
-                <a:effectLst/>
-                <a:latin typeface="+mn-lt"/>
-                <a:ea typeface="+mn-ea"/>
-                <a:cs typeface="+mn-cs"/>
-              </a:rPr>
-              <a:t>=1}^N \begin{</a:t>
-            </a:r>
-            <a:r>
-              <a:rPr lang="en-US" sz="1200" kern="1200" dirty="0" err="1">
-                <a:solidFill>
-                  <a:schemeClr val="tx1"/>
-                </a:solidFill>
-                <a:effectLst/>
-                <a:latin typeface="+mn-lt"/>
-                <a:ea typeface="+mn-ea"/>
-                <a:cs typeface="+mn-cs"/>
-              </a:rPr>
-              <a:t>bmatrix</a:t>
-            </a:r>
-            <a:r>
-              <a:rPr lang="en-US" sz="1200" kern="1200" dirty="0">
-                <a:solidFill>
-                  <a:schemeClr val="tx1"/>
-                </a:solidFill>
-                <a:effectLst/>
-                <a:latin typeface="+mn-lt"/>
-                <a:ea typeface="+mn-ea"/>
-                <a:cs typeface="+mn-cs"/>
-              </a:rPr>
-              <a:t>}x_t^2 &amp; </a:t>
-            </a:r>
-            <a:r>
-              <a:rPr lang="en-US" sz="1200" kern="1200" dirty="0" err="1">
-                <a:solidFill>
-                  <a:schemeClr val="tx1"/>
-                </a:solidFill>
-                <a:effectLst/>
-                <a:latin typeface="+mn-lt"/>
-                <a:ea typeface="+mn-ea"/>
-                <a:cs typeface="+mn-cs"/>
-              </a:rPr>
-              <a:t>x_t</a:t>
-            </a:r>
-            <a:r>
-              <a:rPr lang="en-US" sz="1200" kern="1200" dirty="0">
-                <a:solidFill>
-                  <a:schemeClr val="tx1"/>
-                </a:solidFill>
-                <a:effectLst/>
-                <a:latin typeface="+mn-lt"/>
-                <a:ea typeface="+mn-ea"/>
-                <a:cs typeface="+mn-cs"/>
-              </a:rPr>
-              <a:t> </a:t>
-            </a:r>
-            <a:r>
-              <a:rPr lang="en-US" sz="1200" kern="1200" dirty="0" err="1">
-                <a:solidFill>
-                  <a:schemeClr val="tx1"/>
-                </a:solidFill>
-                <a:effectLst/>
-                <a:latin typeface="+mn-lt"/>
-                <a:ea typeface="+mn-ea"/>
-                <a:cs typeface="+mn-cs"/>
-              </a:rPr>
-              <a:t>u_t</a:t>
-            </a:r>
-            <a:r>
-              <a:rPr lang="en-US" sz="1200" kern="1200" dirty="0">
-                <a:solidFill>
-                  <a:schemeClr val="tx1"/>
-                </a:solidFill>
-                <a:effectLst/>
-                <a:latin typeface="+mn-lt"/>
-                <a:ea typeface="+mn-ea"/>
-                <a:cs typeface="+mn-cs"/>
-              </a:rPr>
-              <a:t> \\ </a:t>
-            </a:r>
-            <a:r>
-              <a:rPr lang="en-US" sz="1200" kern="1200" dirty="0" err="1">
-                <a:solidFill>
-                  <a:schemeClr val="tx1"/>
-                </a:solidFill>
-                <a:effectLst/>
-                <a:latin typeface="+mn-lt"/>
-                <a:ea typeface="+mn-ea"/>
-                <a:cs typeface="+mn-cs"/>
-              </a:rPr>
-              <a:t>x_t</a:t>
-            </a:r>
-            <a:r>
-              <a:rPr lang="en-US" sz="1200" kern="1200" dirty="0">
-                <a:solidFill>
-                  <a:schemeClr val="tx1"/>
-                </a:solidFill>
-                <a:effectLst/>
-                <a:latin typeface="+mn-lt"/>
-                <a:ea typeface="+mn-ea"/>
-                <a:cs typeface="+mn-cs"/>
-              </a:rPr>
-              <a:t> </a:t>
-            </a:r>
-            <a:r>
-              <a:rPr lang="en-US" sz="1200" kern="1200" dirty="0" err="1">
-                <a:solidFill>
-                  <a:schemeClr val="tx1"/>
-                </a:solidFill>
-                <a:effectLst/>
-                <a:latin typeface="+mn-lt"/>
-                <a:ea typeface="+mn-ea"/>
-                <a:cs typeface="+mn-cs"/>
-              </a:rPr>
-              <a:t>u_t</a:t>
-            </a:r>
-            <a:r>
-              <a:rPr lang="en-US" sz="1200" kern="1200" dirty="0">
-                <a:solidFill>
-                  <a:schemeClr val="tx1"/>
-                </a:solidFill>
-                <a:effectLst/>
-                <a:latin typeface="+mn-lt"/>
-                <a:ea typeface="+mn-ea"/>
-                <a:cs typeface="+mn-cs"/>
-              </a:rPr>
-              <a:t> &amp; u_t^2\end{</a:t>
-            </a:r>
-            <a:r>
-              <a:rPr lang="en-US" sz="1200" kern="1200" dirty="0" err="1">
-                <a:solidFill>
-                  <a:schemeClr val="tx1"/>
-                </a:solidFill>
-                <a:effectLst/>
-                <a:latin typeface="+mn-lt"/>
-                <a:ea typeface="+mn-ea"/>
-                <a:cs typeface="+mn-cs"/>
-              </a:rPr>
-              <a:t>bmatrix</a:t>
-            </a:r>
-            <a:r>
-              <a:rPr lang="en-US" sz="1200" kern="1200" dirty="0">
-                <a:solidFill>
-                  <a:schemeClr val="tx1"/>
-                </a:solidFill>
-                <a:effectLst/>
-                <a:latin typeface="+mn-lt"/>
-                <a:ea typeface="+mn-ea"/>
-                <a:cs typeface="+mn-cs"/>
-              </a:rPr>
-              <a:t>}\right)^{-1}</a:t>
-            </a:r>
-          </a:p>
-          <a:p>
             <a:endParaRPr lang="en-US" sz="1200" kern="1200" dirty="0">
               <a:solidFill>
                 <a:schemeClr val="tx1"/>
@@ -4538,939 +1698,6 @@
         <p:txBody>
           <a:bodyPr/>
           <a:lstStyle/>
-          <a:p>
-            <a:r>
-              <a:rPr lang="en-US" sz="1200" kern="1200" dirty="0">
-                <a:solidFill>
-                  <a:schemeClr val="tx1"/>
-                </a:solidFill>
-                <a:effectLst/>
-                <a:latin typeface="+mn-lt"/>
-                <a:ea typeface="+mn-ea"/>
-                <a:cs typeface="+mn-cs"/>
-              </a:rPr>
-              <a:t>\</a:t>
-            </a:r>
-            <a:r>
-              <a:rPr lang="en-US" sz="1200" kern="1200" dirty="0" err="1">
-                <a:solidFill>
-                  <a:schemeClr val="tx1"/>
-                </a:solidFill>
-                <a:effectLst/>
-                <a:latin typeface="+mn-lt"/>
-                <a:ea typeface="+mn-ea"/>
-                <a:cs typeface="+mn-cs"/>
-              </a:rPr>
-              <a:t>widehat</a:t>
-            </a:r>
-            <a:r>
-              <a:rPr lang="en-US" sz="1200" kern="1200" dirty="0">
-                <a:solidFill>
-                  <a:schemeClr val="tx1"/>
-                </a:solidFill>
-                <a:effectLst/>
-                <a:latin typeface="+mn-lt"/>
-                <a:ea typeface="+mn-ea"/>
-                <a:cs typeface="+mn-cs"/>
-              </a:rPr>
-              <a:t>\</a:t>
-            </a:r>
-            <a:r>
-              <a:rPr lang="en-US" sz="1200" kern="1200" dirty="0" err="1">
-                <a:solidFill>
-                  <a:schemeClr val="tx1"/>
-                </a:solidFill>
-                <a:effectLst/>
-                <a:latin typeface="+mn-lt"/>
-                <a:ea typeface="+mn-ea"/>
-                <a:cs typeface="+mn-cs"/>
-              </a:rPr>
-              <a:t>btheta</a:t>
-            </a:r>
-            <a:r>
-              <a:rPr lang="en-US" sz="1200" kern="1200" dirty="0">
-                <a:solidFill>
-                  <a:schemeClr val="tx1"/>
-                </a:solidFill>
-                <a:effectLst/>
-                <a:latin typeface="+mn-lt"/>
-                <a:ea typeface="+mn-ea"/>
-                <a:cs typeface="+mn-cs"/>
-              </a:rPr>
-              <a:t> &amp;= (Z^T Z)^{-1}Z^T\y\\</a:t>
-            </a:r>
-          </a:p>
-          <a:p>
-            <a:r>
-              <a:rPr lang="en-US" sz="1200" kern="1200" dirty="0">
-                <a:solidFill>
-                  <a:schemeClr val="tx1"/>
-                </a:solidFill>
-                <a:effectLst/>
-                <a:latin typeface="+mn-lt"/>
-                <a:ea typeface="+mn-ea"/>
-                <a:cs typeface="+mn-cs"/>
-              </a:rPr>
-              <a:t>                &amp;= (Z^T Z)^{-1}Z^T(Z\</a:t>
-            </a:r>
-            <a:r>
-              <a:rPr lang="en-US" sz="1200" kern="1200" dirty="0" err="1">
-                <a:solidFill>
-                  <a:schemeClr val="tx1"/>
-                </a:solidFill>
-                <a:effectLst/>
-                <a:latin typeface="+mn-lt"/>
-                <a:ea typeface="+mn-ea"/>
-                <a:cs typeface="+mn-cs"/>
-              </a:rPr>
-              <a:t>btheta</a:t>
-            </a:r>
-            <a:r>
-              <a:rPr lang="en-US" sz="1200" kern="1200" dirty="0">
-                <a:solidFill>
-                  <a:schemeClr val="tx1"/>
-                </a:solidFill>
-                <a:effectLst/>
-                <a:latin typeface="+mn-lt"/>
-                <a:ea typeface="+mn-ea"/>
-                <a:cs typeface="+mn-cs"/>
-              </a:rPr>
-              <a:t> + \</a:t>
-            </a:r>
-            <a:r>
-              <a:rPr lang="en-US" sz="1200" kern="1200" dirty="0" err="1">
-                <a:solidFill>
-                  <a:schemeClr val="tx1"/>
-                </a:solidFill>
-                <a:effectLst/>
-                <a:latin typeface="+mn-lt"/>
-                <a:ea typeface="+mn-ea"/>
-                <a:cs typeface="+mn-cs"/>
-              </a:rPr>
-              <a:t>beps</a:t>
-            </a:r>
-            <a:r>
-              <a:rPr lang="en-US" sz="1200" kern="1200" dirty="0">
-                <a:solidFill>
-                  <a:schemeClr val="tx1"/>
-                </a:solidFill>
-                <a:effectLst/>
-                <a:latin typeface="+mn-lt"/>
-                <a:ea typeface="+mn-ea"/>
-                <a:cs typeface="+mn-cs"/>
-              </a:rPr>
-              <a:t>)\\</a:t>
-            </a:r>
-          </a:p>
-          <a:p>
-            <a:r>
-              <a:rPr lang="en-US" sz="1200" kern="1200" dirty="0">
-                <a:solidFill>
-                  <a:schemeClr val="tx1"/>
-                </a:solidFill>
-                <a:effectLst/>
-                <a:latin typeface="+mn-lt"/>
-                <a:ea typeface="+mn-ea"/>
-                <a:cs typeface="+mn-cs"/>
-              </a:rPr>
-              <a:t>                &amp;= \</a:t>
-            </a:r>
-            <a:r>
-              <a:rPr lang="en-US" sz="1200" kern="1200" dirty="0" err="1">
-                <a:solidFill>
-                  <a:schemeClr val="tx1"/>
-                </a:solidFill>
-                <a:effectLst/>
-                <a:latin typeface="+mn-lt"/>
-                <a:ea typeface="+mn-ea"/>
-                <a:cs typeface="+mn-cs"/>
-              </a:rPr>
-              <a:t>btheta</a:t>
-            </a:r>
-            <a:r>
-              <a:rPr lang="en-US" sz="1200" kern="1200" dirty="0">
-                <a:solidFill>
-                  <a:schemeClr val="tx1"/>
-                </a:solidFill>
-                <a:effectLst/>
-                <a:latin typeface="+mn-lt"/>
-                <a:ea typeface="+mn-ea"/>
-                <a:cs typeface="+mn-cs"/>
-              </a:rPr>
-              <a:t> + (Z^T Z)^{-1}Z^T\</a:t>
-            </a:r>
-            <a:r>
-              <a:rPr lang="en-US" sz="1200" kern="1200" dirty="0" err="1">
-                <a:solidFill>
-                  <a:schemeClr val="tx1"/>
-                </a:solidFill>
-                <a:effectLst/>
-                <a:latin typeface="+mn-lt"/>
-                <a:ea typeface="+mn-ea"/>
-                <a:cs typeface="+mn-cs"/>
-              </a:rPr>
-              <a:t>beps</a:t>
-            </a:r>
-            <a:endParaRPr lang="en-US" sz="1200" kern="1200" dirty="0">
-              <a:solidFill>
-                <a:schemeClr val="tx1"/>
-              </a:solidFill>
-              <a:effectLst/>
-              <a:latin typeface="+mn-lt"/>
-              <a:ea typeface="+mn-ea"/>
-              <a:cs typeface="+mn-cs"/>
-            </a:endParaRPr>
-          </a:p>
-          <a:p>
-            <a:endParaRPr lang="en-US" sz="1200" kern="1200" dirty="0">
-              <a:solidFill>
-                <a:schemeClr val="tx1"/>
-              </a:solidFill>
-              <a:effectLst/>
-              <a:latin typeface="+mn-lt"/>
-              <a:ea typeface="+mn-ea"/>
-              <a:cs typeface="+mn-cs"/>
-            </a:endParaRPr>
-          </a:p>
-          <a:p>
-            <a:endParaRPr lang="en-US" sz="1200" kern="1200" dirty="0">
-              <a:solidFill>
-                <a:schemeClr val="tx1"/>
-              </a:solidFill>
-              <a:effectLst/>
-              <a:latin typeface="+mn-lt"/>
-              <a:ea typeface="+mn-ea"/>
-              <a:cs typeface="+mn-cs"/>
-            </a:endParaRPr>
-          </a:p>
-          <a:p>
-            <a:endParaRPr lang="en-US" sz="1200" kern="1200" dirty="0">
-              <a:solidFill>
-                <a:schemeClr val="tx1"/>
-              </a:solidFill>
-              <a:effectLst/>
-              <a:latin typeface="+mn-lt"/>
-              <a:ea typeface="+mn-ea"/>
-              <a:cs typeface="+mn-cs"/>
-            </a:endParaRPr>
-          </a:p>
-          <a:p>
-            <a:r>
-              <a:rPr lang="en-US" sz="1200" kern="1200" dirty="0">
-                <a:solidFill>
-                  <a:schemeClr val="tx1"/>
-                </a:solidFill>
-                <a:effectLst/>
-                <a:latin typeface="+mn-lt"/>
-                <a:ea typeface="+mn-ea"/>
-                <a:cs typeface="+mn-cs"/>
-              </a:rPr>
-              <a:t>\E[\</a:t>
-            </a:r>
-            <a:r>
-              <a:rPr lang="en-US" sz="1200" kern="1200" dirty="0" err="1">
-                <a:solidFill>
-                  <a:schemeClr val="tx1"/>
-                </a:solidFill>
-                <a:effectLst/>
-                <a:latin typeface="+mn-lt"/>
-                <a:ea typeface="+mn-ea"/>
-                <a:cs typeface="+mn-cs"/>
-              </a:rPr>
-              <a:t>widehat</a:t>
-            </a:r>
-            <a:r>
-              <a:rPr lang="en-US" sz="1200" kern="1200" dirty="0">
-                <a:solidFill>
-                  <a:schemeClr val="tx1"/>
-                </a:solidFill>
-                <a:effectLst/>
-                <a:latin typeface="+mn-lt"/>
-                <a:ea typeface="+mn-ea"/>
-                <a:cs typeface="+mn-cs"/>
-              </a:rPr>
-              <a:t>\</a:t>
-            </a:r>
-            <a:r>
-              <a:rPr lang="en-US" sz="1200" kern="1200" dirty="0" err="1">
-                <a:solidFill>
-                  <a:schemeClr val="tx1"/>
-                </a:solidFill>
-                <a:effectLst/>
-                <a:latin typeface="+mn-lt"/>
-                <a:ea typeface="+mn-ea"/>
-                <a:cs typeface="+mn-cs"/>
-              </a:rPr>
-              <a:t>btheta</a:t>
-            </a:r>
-            <a:r>
-              <a:rPr lang="en-US" sz="1200" kern="1200" dirty="0">
-                <a:solidFill>
-                  <a:schemeClr val="tx1"/>
-                </a:solidFill>
-                <a:effectLst/>
-                <a:latin typeface="+mn-lt"/>
-                <a:ea typeface="+mn-ea"/>
-                <a:cs typeface="+mn-cs"/>
-              </a:rPr>
-              <a:t>] &amp;= \E[\</a:t>
-            </a:r>
-            <a:r>
-              <a:rPr lang="en-US" sz="1200" kern="1200" dirty="0" err="1">
-                <a:solidFill>
-                  <a:schemeClr val="tx1"/>
-                </a:solidFill>
-                <a:effectLst/>
-                <a:latin typeface="+mn-lt"/>
-                <a:ea typeface="+mn-ea"/>
-                <a:cs typeface="+mn-cs"/>
-              </a:rPr>
-              <a:t>btheta</a:t>
-            </a:r>
-            <a:r>
-              <a:rPr lang="en-US" sz="1200" kern="1200" dirty="0">
-                <a:solidFill>
-                  <a:schemeClr val="tx1"/>
-                </a:solidFill>
-                <a:effectLst/>
-                <a:latin typeface="+mn-lt"/>
-                <a:ea typeface="+mn-ea"/>
-                <a:cs typeface="+mn-cs"/>
-              </a:rPr>
-              <a:t> + (Z^T Z)^{-1}Z^T\</a:t>
-            </a:r>
-            <a:r>
-              <a:rPr lang="en-US" sz="1200" kern="1200" dirty="0" err="1">
-                <a:solidFill>
-                  <a:schemeClr val="tx1"/>
-                </a:solidFill>
-                <a:effectLst/>
-                <a:latin typeface="+mn-lt"/>
-                <a:ea typeface="+mn-ea"/>
-                <a:cs typeface="+mn-cs"/>
-              </a:rPr>
-              <a:t>beps</a:t>
-            </a:r>
-            <a:r>
-              <a:rPr lang="en-US" sz="1200" kern="1200" dirty="0">
-                <a:solidFill>
-                  <a:schemeClr val="tx1"/>
-                </a:solidFill>
-                <a:effectLst/>
-                <a:latin typeface="+mn-lt"/>
-                <a:ea typeface="+mn-ea"/>
-                <a:cs typeface="+mn-cs"/>
-              </a:rPr>
-              <a:t>]\\</a:t>
-            </a:r>
-          </a:p>
-          <a:p>
-            <a:r>
-              <a:rPr lang="en-US" sz="1200" kern="1200" dirty="0">
-                <a:solidFill>
-                  <a:schemeClr val="tx1"/>
-                </a:solidFill>
-                <a:effectLst/>
-                <a:latin typeface="+mn-lt"/>
-                <a:ea typeface="+mn-ea"/>
-                <a:cs typeface="+mn-cs"/>
-              </a:rPr>
-              <a:t>                    &amp;= \</a:t>
-            </a:r>
-            <a:r>
-              <a:rPr lang="en-US" sz="1200" kern="1200" dirty="0" err="1">
-                <a:solidFill>
-                  <a:schemeClr val="tx1"/>
-                </a:solidFill>
-                <a:effectLst/>
-                <a:latin typeface="+mn-lt"/>
-                <a:ea typeface="+mn-ea"/>
-                <a:cs typeface="+mn-cs"/>
-              </a:rPr>
-              <a:t>btheta</a:t>
-            </a:r>
-            <a:r>
-              <a:rPr lang="en-US" sz="1200" kern="1200" dirty="0">
-                <a:solidFill>
-                  <a:schemeClr val="tx1"/>
-                </a:solidFill>
-                <a:effectLst/>
-                <a:latin typeface="+mn-lt"/>
-                <a:ea typeface="+mn-ea"/>
-                <a:cs typeface="+mn-cs"/>
-              </a:rPr>
-              <a:t> + (Z^T Z)^{-1}Z^T\E[\</a:t>
-            </a:r>
-            <a:r>
-              <a:rPr lang="en-US" sz="1200" kern="1200" dirty="0" err="1">
-                <a:solidFill>
-                  <a:schemeClr val="tx1"/>
-                </a:solidFill>
-                <a:effectLst/>
-                <a:latin typeface="+mn-lt"/>
-                <a:ea typeface="+mn-ea"/>
-                <a:cs typeface="+mn-cs"/>
-              </a:rPr>
-              <a:t>beps</a:t>
-            </a:r>
-            <a:r>
-              <a:rPr lang="en-US" sz="1200" kern="1200" dirty="0">
-                <a:solidFill>
-                  <a:schemeClr val="tx1"/>
-                </a:solidFill>
-                <a:effectLst/>
-                <a:latin typeface="+mn-lt"/>
-                <a:ea typeface="+mn-ea"/>
-                <a:cs typeface="+mn-cs"/>
-              </a:rPr>
-              <a:t>]\\</a:t>
-            </a:r>
-          </a:p>
-          <a:p>
-            <a:r>
-              <a:rPr lang="en-US" sz="1200" kern="1200" dirty="0">
-                <a:solidFill>
-                  <a:schemeClr val="tx1"/>
-                </a:solidFill>
-                <a:effectLst/>
-                <a:latin typeface="+mn-lt"/>
-                <a:ea typeface="+mn-ea"/>
-                <a:cs typeface="+mn-cs"/>
-              </a:rPr>
-              <a:t>                    &amp;= \</a:t>
-            </a:r>
-            <a:r>
-              <a:rPr lang="en-US" sz="1200" kern="1200" dirty="0" err="1">
-                <a:solidFill>
-                  <a:schemeClr val="tx1"/>
-                </a:solidFill>
-                <a:effectLst/>
-                <a:latin typeface="+mn-lt"/>
-                <a:ea typeface="+mn-ea"/>
-                <a:cs typeface="+mn-cs"/>
-              </a:rPr>
-              <a:t>btheta</a:t>
-            </a:r>
-            <a:endParaRPr lang="en-US" sz="1200" kern="1200" dirty="0">
-              <a:solidFill>
-                <a:schemeClr val="tx1"/>
-              </a:solidFill>
-              <a:effectLst/>
-              <a:latin typeface="+mn-lt"/>
-              <a:ea typeface="+mn-ea"/>
-              <a:cs typeface="+mn-cs"/>
-            </a:endParaRPr>
-          </a:p>
-          <a:p>
-            <a:endParaRPr lang="en-US" sz="1200" kern="1200" dirty="0">
-              <a:solidFill>
-                <a:schemeClr val="tx1"/>
-              </a:solidFill>
-              <a:effectLst/>
-              <a:latin typeface="+mn-lt"/>
-              <a:ea typeface="+mn-ea"/>
-              <a:cs typeface="+mn-cs"/>
-            </a:endParaRPr>
-          </a:p>
-          <a:p>
-            <a:endParaRPr lang="en-US" sz="1200" kern="1200" dirty="0">
-              <a:solidFill>
-                <a:schemeClr val="tx1"/>
-              </a:solidFill>
-              <a:effectLst/>
-              <a:latin typeface="+mn-lt"/>
-              <a:ea typeface="+mn-ea"/>
-              <a:cs typeface="+mn-cs"/>
-            </a:endParaRPr>
-          </a:p>
-          <a:p>
-            <a:r>
-              <a:rPr lang="en-US" sz="1200" kern="1200" dirty="0">
-                <a:solidFill>
-                  <a:schemeClr val="tx1"/>
-                </a:solidFill>
-                <a:effectLst/>
-                <a:latin typeface="+mn-lt"/>
-                <a:ea typeface="+mn-ea"/>
-                <a:cs typeface="+mn-cs"/>
-              </a:rPr>
-              <a:t>\</a:t>
-            </a:r>
-            <a:r>
-              <a:rPr lang="en-US" sz="1200" kern="1200" dirty="0" err="1">
-                <a:solidFill>
-                  <a:schemeClr val="tx1"/>
-                </a:solidFill>
-                <a:effectLst/>
-                <a:latin typeface="+mn-lt"/>
-                <a:ea typeface="+mn-ea"/>
-                <a:cs typeface="+mn-cs"/>
-              </a:rPr>
-              <a:t>cov</a:t>
-            </a:r>
-            <a:r>
-              <a:rPr lang="en-US" sz="1200" kern="1200" dirty="0">
-                <a:solidFill>
-                  <a:schemeClr val="tx1"/>
-                </a:solidFill>
-                <a:effectLst/>
-                <a:latin typeface="+mn-lt"/>
-                <a:ea typeface="+mn-ea"/>
-                <a:cs typeface="+mn-cs"/>
-              </a:rPr>
-              <a:t>[\</a:t>
-            </a:r>
-            <a:r>
-              <a:rPr lang="en-US" sz="1200" kern="1200" dirty="0" err="1">
-                <a:solidFill>
-                  <a:schemeClr val="tx1"/>
-                </a:solidFill>
-                <a:effectLst/>
-                <a:latin typeface="+mn-lt"/>
-                <a:ea typeface="+mn-ea"/>
-                <a:cs typeface="+mn-cs"/>
-              </a:rPr>
-              <a:t>widehat</a:t>
-            </a:r>
-            <a:r>
-              <a:rPr lang="en-US" sz="1200" kern="1200" dirty="0">
-                <a:solidFill>
-                  <a:schemeClr val="tx1"/>
-                </a:solidFill>
-                <a:effectLst/>
-                <a:latin typeface="+mn-lt"/>
-                <a:ea typeface="+mn-ea"/>
-                <a:cs typeface="+mn-cs"/>
-              </a:rPr>
-              <a:t>\</a:t>
-            </a:r>
-            <a:r>
-              <a:rPr lang="en-US" sz="1200" kern="1200" dirty="0" err="1">
-                <a:solidFill>
-                  <a:schemeClr val="tx1"/>
-                </a:solidFill>
-                <a:effectLst/>
-                <a:latin typeface="+mn-lt"/>
-                <a:ea typeface="+mn-ea"/>
-                <a:cs typeface="+mn-cs"/>
-              </a:rPr>
-              <a:t>btheta</a:t>
-            </a:r>
-            <a:r>
-              <a:rPr lang="en-US" sz="1200" kern="1200" dirty="0">
-                <a:solidFill>
-                  <a:schemeClr val="tx1"/>
-                </a:solidFill>
-                <a:effectLst/>
-                <a:latin typeface="+mn-lt"/>
-                <a:ea typeface="+mn-ea"/>
-                <a:cs typeface="+mn-cs"/>
-              </a:rPr>
-              <a:t>] &amp;= \</a:t>
-            </a:r>
-            <a:r>
-              <a:rPr lang="en-US" sz="1200" kern="1200" dirty="0" err="1">
-                <a:solidFill>
-                  <a:schemeClr val="tx1"/>
-                </a:solidFill>
-                <a:effectLst/>
-                <a:latin typeface="+mn-lt"/>
-                <a:ea typeface="+mn-ea"/>
-                <a:cs typeface="+mn-cs"/>
-              </a:rPr>
-              <a:t>cov</a:t>
-            </a:r>
-            <a:r>
-              <a:rPr lang="en-US" sz="1200" kern="1200" dirty="0">
-                <a:solidFill>
-                  <a:schemeClr val="tx1"/>
-                </a:solidFill>
-                <a:effectLst/>
-                <a:latin typeface="+mn-lt"/>
-                <a:ea typeface="+mn-ea"/>
-                <a:cs typeface="+mn-cs"/>
-              </a:rPr>
-              <a:t>[\</a:t>
-            </a:r>
-            <a:r>
-              <a:rPr lang="en-US" sz="1200" kern="1200" dirty="0" err="1">
-                <a:solidFill>
-                  <a:schemeClr val="tx1"/>
-                </a:solidFill>
-                <a:effectLst/>
-                <a:latin typeface="+mn-lt"/>
-                <a:ea typeface="+mn-ea"/>
-                <a:cs typeface="+mn-cs"/>
-              </a:rPr>
-              <a:t>btheta</a:t>
-            </a:r>
-            <a:r>
-              <a:rPr lang="en-US" sz="1200" kern="1200" dirty="0">
-                <a:solidFill>
-                  <a:schemeClr val="tx1"/>
-                </a:solidFill>
-                <a:effectLst/>
-                <a:latin typeface="+mn-lt"/>
-                <a:ea typeface="+mn-ea"/>
-                <a:cs typeface="+mn-cs"/>
-              </a:rPr>
-              <a:t> + (Z^T Z)^{-1}Z^T\</a:t>
-            </a:r>
-            <a:r>
-              <a:rPr lang="en-US" sz="1200" kern="1200" dirty="0" err="1">
-                <a:solidFill>
-                  <a:schemeClr val="tx1"/>
-                </a:solidFill>
-                <a:effectLst/>
-                <a:latin typeface="+mn-lt"/>
-                <a:ea typeface="+mn-ea"/>
-                <a:cs typeface="+mn-cs"/>
-              </a:rPr>
-              <a:t>beps</a:t>
-            </a:r>
-            <a:r>
-              <a:rPr lang="en-US" sz="1200" kern="1200" dirty="0">
-                <a:solidFill>
-                  <a:schemeClr val="tx1"/>
-                </a:solidFill>
-                <a:effectLst/>
-                <a:latin typeface="+mn-lt"/>
-                <a:ea typeface="+mn-ea"/>
-                <a:cs typeface="+mn-cs"/>
-              </a:rPr>
-              <a:t>]\\</a:t>
-            </a:r>
-          </a:p>
-          <a:p>
-            <a:r>
-              <a:rPr lang="en-US" sz="1200" kern="1200" dirty="0">
-                <a:solidFill>
-                  <a:schemeClr val="tx1"/>
-                </a:solidFill>
-                <a:effectLst/>
-                <a:latin typeface="+mn-lt"/>
-                <a:ea typeface="+mn-ea"/>
-                <a:cs typeface="+mn-cs"/>
-              </a:rPr>
-              <a:t>                      &amp;= (Z^T Z)^{-1}Z^T\</a:t>
-            </a:r>
-            <a:r>
-              <a:rPr lang="en-US" sz="1200" kern="1200" dirty="0" err="1">
-                <a:solidFill>
-                  <a:schemeClr val="tx1"/>
-                </a:solidFill>
-                <a:effectLst/>
-                <a:latin typeface="+mn-lt"/>
-                <a:ea typeface="+mn-ea"/>
-                <a:cs typeface="+mn-cs"/>
-              </a:rPr>
-              <a:t>cov</a:t>
-            </a:r>
-            <a:r>
-              <a:rPr lang="en-US" sz="1200" kern="1200" dirty="0">
-                <a:solidFill>
-                  <a:schemeClr val="tx1"/>
-                </a:solidFill>
-                <a:effectLst/>
-                <a:latin typeface="+mn-lt"/>
-                <a:ea typeface="+mn-ea"/>
-                <a:cs typeface="+mn-cs"/>
-              </a:rPr>
-              <a:t>[\</a:t>
-            </a:r>
-            <a:r>
-              <a:rPr lang="en-US" sz="1200" kern="1200" dirty="0" err="1">
-                <a:solidFill>
-                  <a:schemeClr val="tx1"/>
-                </a:solidFill>
-                <a:effectLst/>
-                <a:latin typeface="+mn-lt"/>
-                <a:ea typeface="+mn-ea"/>
-                <a:cs typeface="+mn-cs"/>
-              </a:rPr>
-              <a:t>beps</a:t>
-            </a:r>
-            <a:r>
-              <a:rPr lang="en-US" sz="1200" kern="1200" dirty="0">
-                <a:solidFill>
-                  <a:schemeClr val="tx1"/>
-                </a:solidFill>
-                <a:effectLst/>
-                <a:latin typeface="+mn-lt"/>
-                <a:ea typeface="+mn-ea"/>
-                <a:cs typeface="+mn-cs"/>
-              </a:rPr>
-              <a:t>]Z(Z^T Z)^{-1}\\</a:t>
-            </a:r>
-          </a:p>
-          <a:p>
-            <a:r>
-              <a:rPr lang="en-US" sz="1200" kern="1200" dirty="0">
-                <a:solidFill>
-                  <a:schemeClr val="tx1"/>
-                </a:solidFill>
-                <a:effectLst/>
-                <a:latin typeface="+mn-lt"/>
-                <a:ea typeface="+mn-ea"/>
-                <a:cs typeface="+mn-cs"/>
-              </a:rPr>
-              <a:t>                      &amp;= \sigma^2 (Z^T Z)^{-1}\\</a:t>
-            </a:r>
-          </a:p>
-          <a:p>
-            <a:r>
-              <a:rPr lang="en-US" sz="1200" kern="1200" dirty="0">
-                <a:solidFill>
-                  <a:schemeClr val="tx1"/>
-                </a:solidFill>
-                <a:effectLst/>
-                <a:latin typeface="+mn-lt"/>
-                <a:ea typeface="+mn-ea"/>
-                <a:cs typeface="+mn-cs"/>
-              </a:rPr>
-              <a:t>                      &amp;= \sigma^2 \left(\sum_{</a:t>
-            </a:r>
-            <a:r>
-              <a:rPr lang="en-US" sz="1200" kern="1200" dirty="0" err="1">
-                <a:solidFill>
-                  <a:schemeClr val="tx1"/>
-                </a:solidFill>
-                <a:effectLst/>
-                <a:latin typeface="+mn-lt"/>
-                <a:ea typeface="+mn-ea"/>
-                <a:cs typeface="+mn-cs"/>
-              </a:rPr>
-              <a:t>i</a:t>
-            </a:r>
-            <a:r>
-              <a:rPr lang="en-US" sz="1200" kern="1200" dirty="0">
-                <a:solidFill>
-                  <a:schemeClr val="tx1"/>
-                </a:solidFill>
-                <a:effectLst/>
-                <a:latin typeface="+mn-lt"/>
-                <a:ea typeface="+mn-ea"/>
-                <a:cs typeface="+mn-cs"/>
-              </a:rPr>
-              <a:t>=1}^N \</a:t>
-            </a:r>
-            <a:r>
-              <a:rPr lang="en-US" sz="1200" kern="1200" dirty="0" err="1">
-                <a:solidFill>
-                  <a:schemeClr val="tx1"/>
-                </a:solidFill>
-                <a:effectLst/>
-                <a:latin typeface="+mn-lt"/>
-                <a:ea typeface="+mn-ea"/>
-                <a:cs typeface="+mn-cs"/>
-              </a:rPr>
-              <a:t>z_i</a:t>
-            </a:r>
-            <a:r>
-              <a:rPr lang="en-US" sz="1200" kern="1200" dirty="0">
-                <a:solidFill>
-                  <a:schemeClr val="tx1"/>
-                </a:solidFill>
-                <a:effectLst/>
-                <a:latin typeface="+mn-lt"/>
-                <a:ea typeface="+mn-ea"/>
-                <a:cs typeface="+mn-cs"/>
-              </a:rPr>
-              <a:t> \</a:t>
-            </a:r>
-            <a:r>
-              <a:rPr lang="en-US" sz="1200" kern="1200" dirty="0" err="1">
-                <a:solidFill>
-                  <a:schemeClr val="tx1"/>
-                </a:solidFill>
-                <a:effectLst/>
-                <a:latin typeface="+mn-lt"/>
-                <a:ea typeface="+mn-ea"/>
-                <a:cs typeface="+mn-cs"/>
-              </a:rPr>
-              <a:t>z_i^T</a:t>
-            </a:r>
-            <a:r>
-              <a:rPr lang="en-US" sz="1200" kern="1200" dirty="0">
-                <a:solidFill>
-                  <a:schemeClr val="tx1"/>
-                </a:solidFill>
-                <a:effectLst/>
-                <a:latin typeface="+mn-lt"/>
-                <a:ea typeface="+mn-ea"/>
-                <a:cs typeface="+mn-cs"/>
-              </a:rPr>
-              <a:t>\right)^{-1} = \sigma^2 \left(\sum_{</a:t>
-            </a:r>
-            <a:r>
-              <a:rPr lang="en-US" sz="1200" kern="1200" dirty="0" err="1">
-                <a:solidFill>
-                  <a:schemeClr val="tx1"/>
-                </a:solidFill>
-                <a:effectLst/>
-                <a:latin typeface="+mn-lt"/>
-                <a:ea typeface="+mn-ea"/>
-                <a:cs typeface="+mn-cs"/>
-              </a:rPr>
-              <a:t>i</a:t>
-            </a:r>
-            <a:r>
-              <a:rPr lang="en-US" sz="1200" kern="1200" dirty="0">
-                <a:solidFill>
-                  <a:schemeClr val="tx1"/>
-                </a:solidFill>
-                <a:effectLst/>
-                <a:latin typeface="+mn-lt"/>
-                <a:ea typeface="+mn-ea"/>
-                <a:cs typeface="+mn-cs"/>
-              </a:rPr>
-              <a:t>=1}^N \begin{</a:t>
-            </a:r>
-            <a:r>
-              <a:rPr lang="en-US" sz="1200" kern="1200" dirty="0" err="1">
-                <a:solidFill>
-                  <a:schemeClr val="tx1"/>
-                </a:solidFill>
-                <a:effectLst/>
-                <a:latin typeface="+mn-lt"/>
-                <a:ea typeface="+mn-ea"/>
-                <a:cs typeface="+mn-cs"/>
-              </a:rPr>
-              <a:t>bmatrix</a:t>
-            </a:r>
-            <a:r>
-              <a:rPr lang="en-US" sz="1200" kern="1200" dirty="0">
-                <a:solidFill>
-                  <a:schemeClr val="tx1"/>
-                </a:solidFill>
-                <a:effectLst/>
-                <a:latin typeface="+mn-lt"/>
-                <a:ea typeface="+mn-ea"/>
-                <a:cs typeface="+mn-cs"/>
-              </a:rPr>
-              <a:t>}x_t^2 &amp; </a:t>
-            </a:r>
-            <a:r>
-              <a:rPr lang="en-US" sz="1200" kern="1200" dirty="0" err="1">
-                <a:solidFill>
-                  <a:schemeClr val="tx1"/>
-                </a:solidFill>
-                <a:effectLst/>
-                <a:latin typeface="+mn-lt"/>
-                <a:ea typeface="+mn-ea"/>
-                <a:cs typeface="+mn-cs"/>
-              </a:rPr>
-              <a:t>x_t</a:t>
-            </a:r>
-            <a:r>
-              <a:rPr lang="en-US" sz="1200" kern="1200" dirty="0">
-                <a:solidFill>
-                  <a:schemeClr val="tx1"/>
-                </a:solidFill>
-                <a:effectLst/>
-                <a:latin typeface="+mn-lt"/>
-                <a:ea typeface="+mn-ea"/>
-                <a:cs typeface="+mn-cs"/>
-              </a:rPr>
-              <a:t> </a:t>
-            </a:r>
-            <a:r>
-              <a:rPr lang="en-US" sz="1200" kern="1200" dirty="0" err="1">
-                <a:solidFill>
-                  <a:schemeClr val="tx1"/>
-                </a:solidFill>
-                <a:effectLst/>
-                <a:latin typeface="+mn-lt"/>
-                <a:ea typeface="+mn-ea"/>
-                <a:cs typeface="+mn-cs"/>
-              </a:rPr>
-              <a:t>u_t</a:t>
-            </a:r>
-            <a:r>
-              <a:rPr lang="en-US" sz="1200" kern="1200" dirty="0">
-                <a:solidFill>
-                  <a:schemeClr val="tx1"/>
-                </a:solidFill>
-                <a:effectLst/>
-                <a:latin typeface="+mn-lt"/>
-                <a:ea typeface="+mn-ea"/>
-                <a:cs typeface="+mn-cs"/>
-              </a:rPr>
-              <a:t> \\ </a:t>
-            </a:r>
-            <a:r>
-              <a:rPr lang="en-US" sz="1200" kern="1200" dirty="0" err="1">
-                <a:solidFill>
-                  <a:schemeClr val="tx1"/>
-                </a:solidFill>
-                <a:effectLst/>
-                <a:latin typeface="+mn-lt"/>
-                <a:ea typeface="+mn-ea"/>
-                <a:cs typeface="+mn-cs"/>
-              </a:rPr>
-              <a:t>x_t</a:t>
-            </a:r>
-            <a:r>
-              <a:rPr lang="en-US" sz="1200" kern="1200" dirty="0">
-                <a:solidFill>
-                  <a:schemeClr val="tx1"/>
-                </a:solidFill>
-                <a:effectLst/>
-                <a:latin typeface="+mn-lt"/>
-                <a:ea typeface="+mn-ea"/>
-                <a:cs typeface="+mn-cs"/>
-              </a:rPr>
-              <a:t> </a:t>
-            </a:r>
-            <a:r>
-              <a:rPr lang="en-US" sz="1200" kern="1200" dirty="0" err="1">
-                <a:solidFill>
-                  <a:schemeClr val="tx1"/>
-                </a:solidFill>
-                <a:effectLst/>
-                <a:latin typeface="+mn-lt"/>
-                <a:ea typeface="+mn-ea"/>
-                <a:cs typeface="+mn-cs"/>
-              </a:rPr>
-              <a:t>u_t</a:t>
-            </a:r>
-            <a:r>
-              <a:rPr lang="en-US" sz="1200" kern="1200" dirty="0">
-                <a:solidFill>
-                  <a:schemeClr val="tx1"/>
-                </a:solidFill>
-                <a:effectLst/>
-                <a:latin typeface="+mn-lt"/>
-                <a:ea typeface="+mn-ea"/>
-                <a:cs typeface="+mn-cs"/>
-              </a:rPr>
-              <a:t> &amp; u_t^2\end{</a:t>
-            </a:r>
-            <a:r>
-              <a:rPr lang="en-US" sz="1200" kern="1200" dirty="0" err="1">
-                <a:solidFill>
-                  <a:schemeClr val="tx1"/>
-                </a:solidFill>
-                <a:effectLst/>
-                <a:latin typeface="+mn-lt"/>
-                <a:ea typeface="+mn-ea"/>
-                <a:cs typeface="+mn-cs"/>
-              </a:rPr>
-              <a:t>bmatrix</a:t>
-            </a:r>
-            <a:r>
-              <a:rPr lang="en-US" sz="1200" kern="1200" dirty="0">
-                <a:solidFill>
-                  <a:schemeClr val="tx1"/>
-                </a:solidFill>
-                <a:effectLst/>
-                <a:latin typeface="+mn-lt"/>
-                <a:ea typeface="+mn-ea"/>
-                <a:cs typeface="+mn-cs"/>
-              </a:rPr>
-              <a:t>}\right)^{-1}</a:t>
-            </a:r>
-          </a:p>
           <a:p>
             <a:endParaRPr lang="en-US" sz="1200" kern="1200" dirty="0">
               <a:solidFill>
@@ -8931,7 +5158,7 @@
           </a:ln>
           <a:extLst>
             <a:ext uri="{C572A759-6A51-4108-AA02-DFA0A04FC94B}">
-              <ma14:wrappingTextBoxFlag xmlns="" xmlns:m="http://schemas.openxmlformats.org/officeDocument/2006/math" xmlns:a14="http://schemas.microsoft.com/office/drawing/2010/main" xmlns:ma14="http://schemas.microsoft.com/office/mac/drawingml/2011/main" val="1"/>
+              <ma14:wrappingTextBoxFlag xmlns:ma14="http://schemas.microsoft.com/office/mac/drawingml/2011/main" xmlns:a14="http://schemas.microsoft.com/office/drawing/2010/main" xmlns:m="http://schemas.openxmlformats.org/officeDocument/2006/math" xmlns="" val="1"/>
             </a:ext>
           </a:extLst>
         </p:spPr>
@@ -8992,7 +5219,7 @@
           </a:ln>
           <a:extLst>
             <a:ext uri="{C572A759-6A51-4108-AA02-DFA0A04FC94B}">
-              <ma14:wrappingTextBoxFlag xmlns="" xmlns:m="http://schemas.openxmlformats.org/officeDocument/2006/math" xmlns:a14="http://schemas.microsoft.com/office/drawing/2010/main" xmlns:ma14="http://schemas.microsoft.com/office/mac/drawingml/2011/main" val="1"/>
+              <ma14:wrappingTextBoxFlag xmlns:ma14="http://schemas.microsoft.com/office/mac/drawingml/2011/main" xmlns:a14="http://schemas.microsoft.com/office/drawing/2010/main" xmlns:m="http://schemas.openxmlformats.org/officeDocument/2006/math" xmlns="" val="1"/>
             </a:ext>
           </a:extLst>
         </p:spPr>
@@ -9080,7 +5307,7 @@
           </a:ln>
           <a:extLst>
             <a:ext uri="{C572A759-6A51-4108-AA02-DFA0A04FC94B}">
-              <ma14:wrappingTextBoxFlag xmlns="" xmlns:m="http://schemas.openxmlformats.org/officeDocument/2006/math" xmlns:a14="http://schemas.microsoft.com/office/drawing/2010/main" xmlns:ma14="http://schemas.microsoft.com/office/mac/drawingml/2011/main" val="1"/>
+              <ma14:wrappingTextBoxFlag xmlns:ma14="http://schemas.microsoft.com/office/mac/drawingml/2011/main" xmlns:a14="http://schemas.microsoft.com/office/drawing/2010/main" xmlns:m="http://schemas.openxmlformats.org/officeDocument/2006/math" xmlns="" val="1"/>
             </a:ext>
           </a:extLst>
         </p:spPr>
@@ -9147,7 +5374,7 @@
           </a:ln>
           <a:extLst>
             <a:ext uri="{C572A759-6A51-4108-AA02-DFA0A04FC94B}">
-              <ma14:wrappingTextBoxFlag xmlns="" xmlns:m="http://schemas.openxmlformats.org/officeDocument/2006/math" xmlns:a14="http://schemas.microsoft.com/office/drawing/2010/main" xmlns:ma14="http://schemas.microsoft.com/office/mac/drawingml/2011/main" val="1"/>
+              <ma14:wrappingTextBoxFlag xmlns:ma14="http://schemas.microsoft.com/office/mac/drawingml/2011/main" xmlns:a14="http://schemas.microsoft.com/office/drawing/2010/main" xmlns:m="http://schemas.openxmlformats.org/officeDocument/2006/math" xmlns="" val="1"/>
             </a:ext>
           </a:extLst>
         </p:spPr>
@@ -9647,10 +5874,7 @@
                 </a:pPr>
                 <a14:m>
                   <m:oMathPara xmlns:m="http://schemas.openxmlformats.org/officeDocument/2006/math">
-                    <m:oMathParaPr>
-                      <m:jc m:val="centerGroup"/>
-                    </m:oMathParaPr>
-                    <m:oMath xmlns:m="http://schemas.openxmlformats.org/officeDocument/2006/math">
+                    <m:oMath>
                       <m:r>
                         <a:rPr lang="en-US" b="0" i="1" smtClean="0">
                           <a:latin typeface="Cambria Math" panose="02040503050406030204" pitchFamily="18" charset="0"/>
@@ -9666,7 +5890,7 @@
                       <m:sSup>
                         <m:sSupPr>
                           <m:ctrlPr>
-                            <a:rPr lang="en-US" b="0" i="1" smtClean="0">
+                            <a:rPr lang="en-US" b="1" i="1" smtClean="0">
                               <a:latin typeface="Cambria Math" panose="02040503050406030204" pitchFamily="18" charset="0"/>
                             </a:rPr>
                           </m:ctrlPr>
@@ -9794,7 +6018,7 @@
                     <m:sSub>
                       <m:sSubPr>
                         <m:ctrlPr>
-                          <a:rPr lang="en-US" b="0" i="1" smtClean="0">
+                          <a:rPr lang="en-US" b="1" i="1" smtClean="0">
                             <a:latin typeface="Cambria Math" panose="02040503050406030204" pitchFamily="18" charset="0"/>
                           </a:rPr>
                         </m:ctrlPr>
@@ -9825,7 +6049,7 @@
                     <m:sSub>
                       <m:sSubPr>
                         <m:ctrlPr>
-                          <a:rPr lang="en-US" b="0" i="1" smtClean="0">
+                          <a:rPr lang="en-US" b="1" i="1" smtClean="0">
                             <a:latin typeface="Cambria Math" panose="02040503050406030204" pitchFamily="18" charset="0"/>
                           </a:rPr>
                         </m:ctrlPr>
@@ -9874,15 +6098,12 @@
                 </a:pPr>
                 <a14:m>
                   <m:oMathPara xmlns:m="http://schemas.openxmlformats.org/officeDocument/2006/math">
-                    <m:oMathParaPr>
-                      <m:jc m:val="centerGroup"/>
-                    </m:oMathParaPr>
-                    <m:oMath xmlns:m="http://schemas.openxmlformats.org/officeDocument/2006/math">
+                    <m:oMath>
                       <m:nary>
                         <m:naryPr>
                           <m:chr m:val="∑"/>
                           <m:ctrlPr>
-                            <a:rPr lang="en-US" b="1" i="1" smtClean="0">
+                            <a:rPr lang="en-US" b="0" i="1" smtClean="0">
                               <a:latin typeface="Cambria Math" panose="02040503050406030204" pitchFamily="18" charset="0"/>
                             </a:rPr>
                           </m:ctrlPr>
@@ -9922,7 +6143,7 @@
                               <m:d>
                                 <m:dPr>
                                   <m:ctrlPr>
-                                    <a:rPr lang="en-US" b="1" i="1" smtClean="0">
+                                    <a:rPr lang="en-US" i="1" smtClean="0">
                                       <a:latin typeface="Cambria Math" panose="02040503050406030204" pitchFamily="18" charset="0"/>
                                     </a:rPr>
                                   </m:ctrlPr>
@@ -9931,7 +6152,7 @@
                                   <m:sSub>
                                     <m:sSubPr>
                                       <m:ctrlPr>
-                                        <a:rPr lang="en-US" i="1" smtClean="0">
+                                        <a:rPr lang="en-US" b="0" i="1" smtClean="0">
                                           <a:latin typeface="Cambria Math" panose="02040503050406030204" pitchFamily="18" charset="0"/>
                                         </a:rPr>
                                       </m:ctrlPr>
@@ -10043,14 +6264,11 @@
                 </a:pPr>
                 <a14:m>
                   <m:oMathPara xmlns:m="http://schemas.openxmlformats.org/officeDocument/2006/math">
-                    <m:oMathParaPr>
-                      <m:jc m:val="centerGroup"/>
-                    </m:oMathParaPr>
-                    <m:oMath xmlns:m="http://schemas.openxmlformats.org/officeDocument/2006/math">
+                    <m:oMath>
                       <m:sSubSup>
                         <m:sSubSupPr>
                           <m:ctrlPr>
-                            <a:rPr lang="en-US" b="0" i="1" smtClean="0">
+                            <a:rPr lang="en-US" i="1">
                               <a:latin typeface="Cambria Math" panose="02040503050406030204" pitchFamily="18" charset="0"/>
                             </a:rPr>
                           </m:ctrlPr>
@@ -10061,7 +6279,7 @@
                               <m:begChr m:val="‖"/>
                               <m:endChr m:val="‖"/>
                               <m:ctrlPr>
-                                <a:rPr lang="en-US" i="1">
+                                <a:rPr lang="en-US" b="1" i="1">
                                   <a:latin typeface="Cambria Math" panose="02040503050406030204" pitchFamily="18" charset="0"/>
                                 </a:rPr>
                               </m:ctrlPr>
@@ -10156,7 +6374,7 @@
                       <m:accPr>
                         <m:chr m:val="̂"/>
                         <m:ctrlPr>
-                          <a:rPr lang="en-US" b="0" i="1" smtClean="0">
+                          <a:rPr lang="en-US" b="1" i="1" smtClean="0">
                             <a:latin typeface="Cambria Math" panose="02040503050406030204" pitchFamily="18" charset="0"/>
                           </a:rPr>
                         </m:ctrlPr>
@@ -10448,10 +6666,7 @@
                 </a:pPr>
                 <a14:m>
                   <m:oMathPara xmlns:m="http://schemas.openxmlformats.org/officeDocument/2006/math">
-                    <m:oMathParaPr>
-                      <m:jc m:val="centerGroup"/>
-                    </m:oMathParaPr>
-                    <m:oMath xmlns:m="http://schemas.openxmlformats.org/officeDocument/2006/math">
+                    <m:oMath>
                       <m:sSub>
                         <m:sSubPr>
                           <m:ctrlPr>
@@ -10535,7 +6750,7 @@
                       <m:sSub>
                         <m:sSubPr>
                           <m:ctrlPr>
-                            <a:rPr lang="en-US" i="1">
+                            <a:rPr lang="en-US" b="0" i="1" smtClean="0">
                               <a:latin typeface="Cambria Math" panose="02040503050406030204" pitchFamily="18" charset="0"/>
                             </a:rPr>
                           </m:ctrlPr>
@@ -10566,8 +6781,9 @@
                       <m:sSub>
                         <m:sSubPr>
                           <m:ctrlPr>
-                            <a:rPr lang="en-US" i="1">
+                            <a:rPr lang="en-US" i="1" smtClean="0">
                               <a:latin typeface="Cambria Math" panose="02040503050406030204" pitchFamily="18" charset="0"/>
+                              <a:ea typeface="Cambria Math" panose="02040503050406030204" pitchFamily="18" charset="0"/>
                             </a:rPr>
                           </m:ctrlPr>
                         </m:sSubPr>
@@ -10669,7 +6885,7 @@
                     <m:sSub>
                       <m:sSubPr>
                         <m:ctrlPr>
-                          <a:rPr lang="en-US" i="1" smtClean="0">
+                          <a:rPr lang="en-US" b="0" i="1" smtClean="0">
                             <a:latin typeface="Cambria Math" panose="02040503050406030204" pitchFamily="18" charset="0"/>
                           </a:rPr>
                         </m:ctrlPr>
@@ -10998,7 +7214,7 @@
                       <m:accPr>
                         <m:chr m:val="̂"/>
                         <m:ctrlPr>
-                          <a:rPr lang="en-US" i="1" smtClean="0">
+                          <a:rPr lang="en-US" b="1" i="1" smtClean="0">
                             <a:latin typeface="Cambria Math" panose="02040503050406030204" pitchFamily="18" charset="0"/>
                             <a:ea typeface="Source Sans Pro" panose="020B0503030403020204" pitchFamily="34" charset="0"/>
                           </a:rPr>
@@ -11061,7 +7277,7 @@
                                 <m:sSup>
                                   <m:sSupPr>
                                     <m:ctrlPr>
-                                      <a:rPr lang="en-US" i="1">
+                                      <a:rPr lang="en-US" b="0" i="1" smtClean="0">
                                         <a:latin typeface="Cambria Math" panose="02040503050406030204" pitchFamily="18" charset="0"/>
                                       </a:rPr>
                                     </m:ctrlPr>
@@ -11151,7 +7367,7 @@
                       <m:accPr>
                         <m:chr m:val="̂"/>
                         <m:ctrlPr>
-                          <a:rPr lang="en-US" i="1">
+                          <a:rPr lang="en-US" b="1" i="1">
                             <a:latin typeface="Cambria Math" panose="02040503050406030204" pitchFamily="18" charset="0"/>
                             <a:ea typeface="Source Sans Pro" panose="020B0503030403020204" pitchFamily="34" charset="0"/>
                           </a:rPr>
@@ -11212,7 +7428,7 @@
                     <m:sSub>
                       <m:sSubPr>
                         <m:ctrlPr>
-                          <a:rPr lang="en-US" i="1" smtClean="0">
+                          <a:rPr lang="en-US" i="1">
                             <a:latin typeface="Cambria Math" panose="02040503050406030204" pitchFamily="18" charset="0"/>
                           </a:rPr>
                         </m:ctrlPr>
@@ -11258,7 +7474,7 @@
                       <m:accPr>
                         <m:chr m:val="̂"/>
                         <m:ctrlPr>
-                          <a:rPr lang="en-US" i="1">
+                          <a:rPr lang="en-US" b="1" i="1">
                             <a:latin typeface="Cambria Math" panose="02040503050406030204" pitchFamily="18" charset="0"/>
                             <a:ea typeface="Source Sans Pro" panose="020B0503030403020204" pitchFamily="34" charset="0"/>
                           </a:rPr>
@@ -11461,7 +7677,7 @@
                       <m:accPr>
                         <m:chr m:val="̂"/>
                         <m:ctrlPr>
-                          <a:rPr lang="en-US" sz="2400" i="1" smtClean="0">
+                          <a:rPr lang="en-US" sz="2400" b="1" i="1" smtClean="0">
                             <a:latin typeface="Cambria Math" panose="02040503050406030204" pitchFamily="18" charset="0"/>
                             <a:ea typeface="Source Sans Pro" panose="020B0503030403020204" pitchFamily="34" charset="0"/>
                           </a:rPr>
@@ -11845,7 +8061,7 @@
                       <m:accPr>
                         <m:chr m:val="̂"/>
                         <m:ctrlPr>
-                          <a:rPr lang="en-US" sz="2400" i="1" smtClean="0">
+                          <a:rPr lang="en-US" sz="2400" b="1" i="1" smtClean="0">
                             <a:latin typeface="Cambria Math" panose="02040503050406030204" pitchFamily="18" charset="0"/>
                             <a:ea typeface="Source Sans Pro" panose="020B0503030403020204" pitchFamily="34" charset="0"/>
                           </a:rPr>
@@ -12610,7 +8826,7 @@
                       <m:accPr>
                         <m:chr m:val="̂"/>
                         <m:ctrlPr>
-                          <a:rPr lang="en-US" sz="2400" i="1" smtClean="0">
+                          <a:rPr lang="en-US" sz="2400" b="1" i="1" smtClean="0">
                             <a:latin typeface="Cambria Math" panose="02040503050406030204" pitchFamily="18" charset="0"/>
                             <a:ea typeface="Source Sans Pro" panose="020B0503030403020204" pitchFamily="34" charset="0"/>
                           </a:rPr>
@@ -13514,7 +9730,7 @@
                       <m:accPr>
                         <m:chr m:val="̂"/>
                         <m:ctrlPr>
-                          <a:rPr lang="en-US" sz="2400" i="1" smtClean="0">
+                          <a:rPr lang="en-US" sz="2400" b="1" i="1" smtClean="0">
                             <a:latin typeface="Cambria Math" panose="02040503050406030204" pitchFamily="18" charset="0"/>
                             <a:ea typeface="Source Sans Pro" panose="020B0503030403020204" pitchFamily="34" charset="0"/>
                           </a:rPr>
@@ -15811,7 +12027,7 @@
           </a:ln>
           <a:extLst>
             <a:ext uri="{C572A759-6A51-4108-AA02-DFA0A04FC94B}">
-              <ma14:wrappingTextBoxFlag xmlns="" xmlns:m="http://schemas.openxmlformats.org/officeDocument/2006/math" xmlns:a14="http://schemas.microsoft.com/office/drawing/2010/main" xmlns:ma14="http://schemas.microsoft.com/office/mac/drawingml/2011/main" val="1"/>
+              <ma14:wrappingTextBoxFlag xmlns:ma14="http://schemas.microsoft.com/office/mac/drawingml/2011/main" xmlns:a14="http://schemas.microsoft.com/office/drawing/2010/main" xmlns:m="http://schemas.openxmlformats.org/officeDocument/2006/math" xmlns="" val="1"/>
             </a:ext>
           </a:extLst>
         </p:spPr>
@@ -15872,7 +12088,7 @@
           </a:ln>
           <a:extLst>
             <a:ext uri="{C572A759-6A51-4108-AA02-DFA0A04FC94B}">
-              <ma14:wrappingTextBoxFlag xmlns="" xmlns:m="http://schemas.openxmlformats.org/officeDocument/2006/math" xmlns:a14="http://schemas.microsoft.com/office/drawing/2010/main" xmlns:ma14="http://schemas.microsoft.com/office/mac/drawingml/2011/main" val="1"/>
+              <ma14:wrappingTextBoxFlag xmlns:ma14="http://schemas.microsoft.com/office/mac/drawingml/2011/main" xmlns:a14="http://schemas.microsoft.com/office/drawing/2010/main" xmlns:m="http://schemas.openxmlformats.org/officeDocument/2006/math" xmlns="" val="1"/>
             </a:ext>
           </a:extLst>
         </p:spPr>
@@ -15972,7 +12188,7 @@
           </a:ln>
           <a:extLst>
             <a:ext uri="{C572A759-6A51-4108-AA02-DFA0A04FC94B}">
-              <ma14:wrappingTextBoxFlag xmlns="" xmlns:m="http://schemas.openxmlformats.org/officeDocument/2006/math" xmlns:a14="http://schemas.microsoft.com/office/drawing/2010/main" xmlns:ma14="http://schemas.microsoft.com/office/mac/drawingml/2011/main" val="1"/>
+              <ma14:wrappingTextBoxFlag xmlns:ma14="http://schemas.microsoft.com/office/mac/drawingml/2011/main" xmlns:a14="http://schemas.microsoft.com/office/drawing/2010/main" xmlns:m="http://schemas.openxmlformats.org/officeDocument/2006/math" xmlns="" val="1"/>
             </a:ext>
           </a:extLst>
         </p:spPr>
@@ -16027,7 +12243,7 @@
           </a:ln>
           <a:extLst>
             <a:ext uri="{C572A759-6A51-4108-AA02-DFA0A04FC94B}">
-              <ma14:wrappingTextBoxFlag xmlns="" xmlns:m="http://schemas.openxmlformats.org/officeDocument/2006/math" xmlns:a14="http://schemas.microsoft.com/office/drawing/2010/main" xmlns:ma14="http://schemas.microsoft.com/office/mac/drawingml/2011/main" val="1"/>
+              <ma14:wrappingTextBoxFlag xmlns:ma14="http://schemas.microsoft.com/office/mac/drawingml/2011/main" xmlns:a14="http://schemas.microsoft.com/office/drawing/2010/main" xmlns:m="http://schemas.openxmlformats.org/officeDocument/2006/math" xmlns="" val="1"/>
             </a:ext>
           </a:extLst>
         </p:spPr>
@@ -16556,7 +12772,7 @@
                       <m:accPr>
                         <m:chr m:val="̇"/>
                         <m:ctrlPr>
-                          <a:rPr lang="en-US" i="1" dirty="0">
+                          <a:rPr lang="en-US" b="1" i="1">
                             <a:latin typeface="Cambria Math" panose="02040503050406030204" pitchFamily="18" charset="0"/>
                           </a:rPr>
                         </m:ctrlPr>
@@ -16588,7 +12804,7 @@
                     <m:d>
                       <m:dPr>
                         <m:ctrlPr>
-                          <a:rPr lang="en-US" i="1">
+                          <a:rPr lang="en-US" b="1" i="1">
                             <a:latin typeface="Cambria Math" panose="02040503050406030204" pitchFamily="18" charset="0"/>
                           </a:rPr>
                         </m:ctrlPr>
@@ -16614,7 +12830,7 @@
                       <m:accPr>
                         <m:chr m:val="̇"/>
                         <m:ctrlPr>
-                          <a:rPr lang="en-US" i="1" dirty="0">
+                          <a:rPr lang="en-US" b="1" i="1">
                             <a:latin typeface="Cambria Math" panose="02040503050406030204" pitchFamily="18" charset="0"/>
                           </a:rPr>
                         </m:ctrlPr>
@@ -16646,7 +12862,7 @@
                     <m:d>
                       <m:dPr>
                         <m:ctrlPr>
-                          <a:rPr lang="en-US" i="1">
+                          <a:rPr lang="en-US" b="1" i="1">
                             <a:latin typeface="Cambria Math" panose="02040503050406030204" pitchFamily="18" charset="0"/>
                           </a:rPr>
                         </m:ctrlPr>
@@ -16724,7 +12940,7 @@
                     <m:sSup>
                       <m:sSupPr>
                         <m:ctrlPr>
-                          <a:rPr lang="en-US" b="0" i="1" smtClean="0">
+                          <a:rPr lang="en-US" b="1" i="1" smtClean="0">
                             <a:latin typeface="Cambria Math" panose="02040503050406030204" pitchFamily="18" charset="0"/>
                           </a:rPr>
                         </m:ctrlPr>
@@ -16774,7 +12990,7 @@
                     <m:d>
                       <m:dPr>
                         <m:ctrlPr>
-                          <a:rPr lang="en-US" b="0" i="1" smtClean="0">
+                          <a:rPr lang="en-US" i="1">
                             <a:latin typeface="Cambria Math" panose="02040503050406030204" pitchFamily="18" charset="0"/>
                           </a:rPr>
                         </m:ctrlPr>
@@ -16783,7 +12999,7 @@
                         <m:sSup>
                           <m:sSupPr>
                             <m:ctrlPr>
-                              <a:rPr lang="en-US" i="1">
+                              <a:rPr lang="en-US" b="1" i="1">
                                 <a:latin typeface="Cambria Math" panose="02040503050406030204" pitchFamily="18" charset="0"/>
                               </a:rPr>
                             </m:ctrlPr>
@@ -16842,7 +13058,7 @@
                     <m:d>
                       <m:dPr>
                         <m:ctrlPr>
-                          <a:rPr lang="en-US" b="0" i="1" smtClean="0">
+                          <a:rPr lang="en-US" b="1" i="1" smtClean="0">
                             <a:latin typeface="Cambria Math" panose="02040503050406030204" pitchFamily="18" charset="0"/>
                           </a:rPr>
                         </m:ctrlPr>
@@ -16886,7 +13102,7 @@
                     <m:sSup>
                       <m:sSupPr>
                         <m:ctrlPr>
-                          <a:rPr lang="en-US" i="1">
+                          <a:rPr lang="en-US" b="1" i="1">
                             <a:latin typeface="Cambria Math" panose="02040503050406030204" pitchFamily="18" charset="0"/>
                           </a:rPr>
                         </m:ctrlPr>
@@ -16934,7 +13150,7 @@
                         <m:sSup>
                           <m:sSupPr>
                             <m:ctrlPr>
-                              <a:rPr lang="en-US" i="1">
+                              <a:rPr lang="en-US" b="1" i="1">
                                 <a:latin typeface="Cambria Math" panose="02040503050406030204" pitchFamily="18" charset="0"/>
                               </a:rPr>
                             </m:ctrlPr>
@@ -16999,7 +13215,7 @@
                     <m:d>
                       <m:dPr>
                         <m:ctrlPr>
-                          <a:rPr lang="en-US" i="1">
+                          <a:rPr lang="en-US" b="1" i="1">
                             <a:latin typeface="Cambria Math" panose="02040503050406030204" pitchFamily="18" charset="0"/>
                           </a:rPr>
                         </m:ctrlPr>
@@ -17049,7 +13265,7 @@
                     <m:sSup>
                       <m:sSupPr>
                         <m:ctrlPr>
-                          <a:rPr lang="en-US" i="1">
+                          <a:rPr lang="en-US" b="1" i="1">
                             <a:latin typeface="Cambria Math" panose="02040503050406030204" pitchFamily="18" charset="0"/>
                           </a:rPr>
                         </m:ctrlPr>
@@ -17094,7 +13310,7 @@
                     <m:d>
                       <m:dPr>
                         <m:ctrlPr>
-                          <a:rPr lang="en-US" i="1">
+                          <a:rPr lang="en-US" b="1" i="1">
                             <a:latin typeface="Cambria Math" panose="02040503050406030204" pitchFamily="18" charset="0"/>
                           </a:rPr>
                         </m:ctrlPr>
@@ -17127,7 +13343,7 @@
                         <m:begChr m:val="‖"/>
                         <m:endChr m:val="‖"/>
                         <m:ctrlPr>
-                          <a:rPr lang="en-US" b="0" i="1" smtClean="0">
+                          <a:rPr lang="en-US" b="1" i="1" smtClean="0">
                             <a:latin typeface="Cambria Math" panose="02040503050406030204" pitchFamily="18" charset="0"/>
                           </a:rPr>
                         </m:ctrlPr>
@@ -17170,7 +13386,7 @@
                     <m:sSup>
                       <m:sSupPr>
                         <m:ctrlPr>
-                          <a:rPr lang="en-US" i="1">
+                          <a:rPr lang="en-US" b="1" i="1">
                             <a:latin typeface="Cambria Math" panose="02040503050406030204" pitchFamily="18" charset="0"/>
                           </a:rPr>
                         </m:ctrlPr>
@@ -18018,10 +14234,7 @@
                 </a:pPr>
                 <a14:m>
                   <m:oMathPara xmlns:m="http://schemas.openxmlformats.org/officeDocument/2006/math">
-                    <m:oMathParaPr>
-                      <m:jc m:val="centerGroup"/>
-                    </m:oMathParaPr>
-                    <m:oMath xmlns:m="http://schemas.openxmlformats.org/officeDocument/2006/math">
+                    <m:oMath>
                       <m:r>
                         <a:rPr lang="en-US" b="0" i="1" smtClean="0">
                           <a:latin typeface="Cambria Math" panose="02040503050406030204" pitchFamily="18" charset="0"/>
@@ -18032,7 +14245,7 @@
                         <m:accPr>
                           <m:chr m:val="̈"/>
                           <m:ctrlPr>
-                            <a:rPr lang="en-US" i="1" smtClean="0">
+                            <a:rPr lang="en-US" b="0" i="1" smtClean="0">
                               <a:latin typeface="Cambria Math" panose="02040503050406030204" pitchFamily="18" charset="0"/>
                             </a:rPr>
                           </m:ctrlPr>
@@ -18163,11 +14376,11 @@
                     <m:oMathParaPr>
                       <m:jc m:val="center"/>
                     </m:oMathParaPr>
-                    <m:oMath xmlns:m="http://schemas.openxmlformats.org/officeDocument/2006/math">
+                    <m:oMath>
                       <m:sSub>
                         <m:sSubPr>
                           <m:ctrlPr>
-                            <a:rPr lang="en-US" b="0" i="1" smtClean="0">
+                            <a:rPr lang="en-US" i="1" smtClean="0">
                               <a:latin typeface="Cambria Math" panose="02040503050406030204" pitchFamily="18" charset="0"/>
                             </a:rPr>
                           </m:ctrlPr>
@@ -18177,7 +14390,7 @@
                             <m:accPr>
                               <m:chr m:val="̈"/>
                               <m:ctrlPr>
-                                <a:rPr lang="en-US" i="1" smtClean="0">
+                                <a:rPr lang="en-US" b="0" i="1" smtClean="0">
                                   <a:latin typeface="Cambria Math" panose="02040503050406030204" pitchFamily="18" charset="0"/>
                                 </a:rPr>
                               </m:ctrlPr>
@@ -18622,10 +14835,7 @@
                 </a:pPr>
                 <a14:m>
                   <m:oMathPara xmlns:m="http://schemas.openxmlformats.org/officeDocument/2006/math">
-                    <m:oMathParaPr>
-                      <m:jc m:val="centerGroup"/>
-                    </m:oMathParaPr>
-                    <m:oMath xmlns:m="http://schemas.openxmlformats.org/officeDocument/2006/math">
+                    <m:oMath>
                       <m:r>
                         <a:rPr lang="en-US" b="0" i="1" smtClean="0">
                           <a:latin typeface="Cambria Math" panose="02040503050406030204" pitchFamily="18" charset="0"/>
@@ -18832,7 +15042,7 @@
                       <m:accPr>
                         <m:chr m:val="̃"/>
                         <m:ctrlPr>
-                          <a:rPr lang="en-US" i="1" smtClean="0">
+                          <a:rPr lang="en-US" b="0" i="1" smtClean="0">
                             <a:latin typeface="Cambria Math" panose="02040503050406030204" pitchFamily="18" charset="0"/>
                           </a:rPr>
                         </m:ctrlPr>
@@ -18918,7 +15128,7 @@
                       <m:accPr>
                         <m:chr m:val="̈"/>
                         <m:ctrlPr>
-                          <a:rPr lang="en-US" b="0" i="1" smtClean="0">
+                          <a:rPr lang="en-US" i="1" smtClean="0">
                             <a:latin typeface="Cambria Math" panose="02040503050406030204" pitchFamily="18" charset="0"/>
                           </a:rPr>
                         </m:ctrlPr>
@@ -18928,7 +15138,7 @@
                           <m:accPr>
                             <m:chr m:val="̃"/>
                             <m:ctrlPr>
-                              <a:rPr lang="en-US" i="1" smtClean="0">
+                              <a:rPr lang="en-US" b="0" i="1" smtClean="0">
                                 <a:latin typeface="Cambria Math" panose="02040503050406030204" pitchFamily="18" charset="0"/>
                               </a:rPr>
                             </m:ctrlPr>
@@ -19258,10 +15468,7 @@
                 </a:pPr>
                 <a14:m>
                   <m:oMathPara xmlns:m="http://schemas.openxmlformats.org/officeDocument/2006/math">
-                    <m:oMathParaPr>
-                      <m:jc m:val="centerGroup"/>
-                    </m:oMathParaPr>
-                    <m:oMath xmlns:m="http://schemas.openxmlformats.org/officeDocument/2006/math">
+                    <m:oMath>
                       <m:r>
                         <a:rPr lang="en-US" b="0" i="1" smtClean="0">
                           <a:latin typeface="Cambria Math" panose="02040503050406030204" pitchFamily="18" charset="0"/>
@@ -19493,10 +15700,7 @@
                 </a:pPr>
                 <a14:m>
                   <m:oMathPara xmlns:m="http://schemas.openxmlformats.org/officeDocument/2006/math">
-                    <m:oMathParaPr>
-                      <m:jc m:val="centerGroup"/>
-                    </m:oMathParaPr>
-                    <m:oMath xmlns:m="http://schemas.openxmlformats.org/officeDocument/2006/math">
+                    <m:oMath>
                       <m:r>
                         <a:rPr lang="en-US" b="0" i="1" smtClean="0">
                           <a:latin typeface="Cambria Math" panose="02040503050406030204" pitchFamily="18" charset="0"/>
@@ -20127,7 +16331,7 @@
           </a:ln>
           <a:extLst>
             <a:ext uri="{C572A759-6A51-4108-AA02-DFA0A04FC94B}">
-              <ma14:wrappingTextBoxFlag xmlns="" xmlns:m="http://schemas.openxmlformats.org/officeDocument/2006/math" xmlns:a14="http://schemas.microsoft.com/office/drawing/2010/main" xmlns:ma14="http://schemas.microsoft.com/office/mac/drawingml/2011/main" val="1"/>
+              <ma14:wrappingTextBoxFlag xmlns:ma14="http://schemas.microsoft.com/office/mac/drawingml/2011/main" xmlns:a14="http://schemas.microsoft.com/office/drawing/2010/main" xmlns:m="http://schemas.openxmlformats.org/officeDocument/2006/math" xmlns="" val="1"/>
             </a:ext>
           </a:extLst>
         </p:spPr>
@@ -20381,12 +16585,12 @@
                     <m:oMathParaPr>
                       <m:jc m:val="center"/>
                     </m:oMathParaPr>
-                    <m:oMath xmlns:m="http://schemas.openxmlformats.org/officeDocument/2006/math">
+                    <m:oMath>
                       <m:acc>
                         <m:accPr>
                           <m:chr m:val="̇"/>
                           <m:ctrlPr>
-                            <a:rPr lang="en-US" b="0" i="1" smtClean="0">
+                            <a:rPr lang="en-US" i="1">
                               <a:latin typeface="Cambria Math" panose="02040503050406030204" pitchFamily="18" charset="0"/>
                             </a:rPr>
                           </m:ctrlPr>
@@ -20507,7 +16711,7 @@
                     <m:oMathParaPr>
                       <m:jc m:val="center"/>
                     </m:oMathParaPr>
-                    <m:oMath xmlns:m="http://schemas.openxmlformats.org/officeDocument/2006/math">
+                    <m:oMath>
                       <m:r>
                         <a:rPr lang="en-US" b="0" i="1" smtClean="0">
                           <a:latin typeface="Cambria Math" panose="02040503050406030204" pitchFamily="18" charset="0"/>
@@ -20621,7 +16825,7 @@
                           <m:sSup>
                             <m:sSupPr>
                               <m:ctrlPr>
-                                <a:rPr lang="en-US" b="0" i="1" smtClean="0">
+                                <a:rPr lang="en-US" i="1">
                                   <a:latin typeface="Cambria Math" panose="02040503050406030204" pitchFamily="18" charset="0"/>
                                 </a:rPr>
                               </m:ctrlPr>
@@ -21897,7 +18101,7 @@
           </a:ln>
           <a:extLst>
             <a:ext uri="{C572A759-6A51-4108-AA02-DFA0A04FC94B}">
-              <ma14:wrappingTextBoxFlag xmlns="" xmlns:m="http://schemas.openxmlformats.org/officeDocument/2006/math" xmlns:a14="http://schemas.microsoft.com/office/drawing/2010/main" xmlns:ma14="http://schemas.microsoft.com/office/mac/drawingml/2011/main" val="1"/>
+              <ma14:wrappingTextBoxFlag xmlns:ma14="http://schemas.microsoft.com/office/mac/drawingml/2011/main" xmlns:a14="http://schemas.microsoft.com/office/drawing/2010/main" xmlns:m="http://schemas.openxmlformats.org/officeDocument/2006/math" xmlns="" val="1"/>
             </a:ext>
           </a:extLst>
         </p:spPr>
@@ -21946,7 +18150,7 @@
           </a:ln>
           <a:extLst>
             <a:ext uri="{C572A759-6A51-4108-AA02-DFA0A04FC94B}">
-              <ma14:wrappingTextBoxFlag xmlns="" xmlns:m="http://schemas.openxmlformats.org/officeDocument/2006/math" xmlns:a14="http://schemas.microsoft.com/office/drawing/2010/main" xmlns:ma14="http://schemas.microsoft.com/office/mac/drawingml/2011/main" val="1"/>
+              <ma14:wrappingTextBoxFlag xmlns:ma14="http://schemas.microsoft.com/office/mac/drawingml/2011/main" xmlns:a14="http://schemas.microsoft.com/office/drawing/2010/main" xmlns:m="http://schemas.openxmlformats.org/officeDocument/2006/math" xmlns="" val="1"/>
             </a:ext>
           </a:extLst>
         </p:spPr>
@@ -22034,7 +18238,7 @@
           </a:ln>
           <a:extLst>
             <a:ext uri="{C572A759-6A51-4108-AA02-DFA0A04FC94B}">
-              <ma14:wrappingTextBoxFlag xmlns="" xmlns:m="http://schemas.openxmlformats.org/officeDocument/2006/math" xmlns:a14="http://schemas.microsoft.com/office/drawing/2010/main" xmlns:ma14="http://schemas.microsoft.com/office/mac/drawingml/2011/main" val="1"/>
+              <ma14:wrappingTextBoxFlag xmlns:ma14="http://schemas.microsoft.com/office/mac/drawingml/2011/main" xmlns:a14="http://schemas.microsoft.com/office/drawing/2010/main" xmlns:m="http://schemas.openxmlformats.org/officeDocument/2006/math" xmlns="" val="1"/>
             </a:ext>
           </a:extLst>
         </p:spPr>
@@ -22089,7 +18293,7 @@
           </a:ln>
           <a:extLst>
             <a:ext uri="{C572A759-6A51-4108-AA02-DFA0A04FC94B}">
-              <ma14:wrappingTextBoxFlag xmlns="" xmlns:m="http://schemas.openxmlformats.org/officeDocument/2006/math" xmlns:a14="http://schemas.microsoft.com/office/drawing/2010/main" xmlns:ma14="http://schemas.microsoft.com/office/mac/drawingml/2011/main" val="1"/>
+              <ma14:wrappingTextBoxFlag xmlns:ma14="http://schemas.microsoft.com/office/mac/drawingml/2011/main" xmlns:a14="http://schemas.microsoft.com/office/drawing/2010/main" xmlns:m="http://schemas.openxmlformats.org/officeDocument/2006/math" xmlns="" val="1"/>
             </a:ext>
           </a:extLst>
         </p:spPr>
